--- a/大创中期检查/智绘PCB_大创中期检查汇报_2026-10-19.pptx
+++ b/大创中期检查/智绘PCB_大创中期检查汇报_2026-10-19.pptx
@@ -4,6 +4,9 @@
   <p:sldMasterIdLst>
     <p:sldMasterId id="2147483648" r:id="rId1"/>
   </p:sldMasterIdLst>
+  <p:notesMasterIdLst>
+    <p:notesMasterId r:id="rId15"/>
+  </p:notesMasterIdLst>
   <p:sldIdLst>
     <p:sldId id="256" r:id="rId2"/>
     <p:sldId id="257" r:id="rId3"/>
@@ -19,9 +22,6 @@
     <p:sldId id="267" r:id="rId13"/>
     <p:sldId id="268" r:id="rId14"/>
   </p:sldIdLst>
-  <p:notesMasterIdLst>
-    <p:notesMasterId r:id="rId15"/>
-  </p:notesMasterIdLst>
   <p:sldSz cx="12192000" cy="6858000"/>
   <p:notesSz cx="6858000" cy="12192000"/>
   <p:defaultTextStyle>
@@ -116,13 +116,20 @@
       </a:defRPr>
     </a:lvl9pPr>
   </p:defaultTextStyle>
+  <p:extLst>
+    <p:ext uri="{EFAFB233-063F-42B5-8137-9DF3F51BA10A}">
+      <p15:sldGuideLst xmlns:p15="http://schemas.microsoft.com/office/powerpoint/2012/main"/>
+    </p:ext>
+  </p:extLst>
 </p:presentation>
 </file>
 
 <file path=ppt/charts/chart1.xml><?xml version="1.0" encoding="utf-8"?>
-<c:chartSpace xmlns:c="http://schemas.openxmlformats.org/drawingml/2006/chart" xmlns:a="http://schemas.openxmlformats.org/drawingml/2006/main" xmlns:r="http://schemas.openxmlformats.org/officeDocument/2006/relationships">
+<c:chartSpace xmlns:c="http://schemas.openxmlformats.org/drawingml/2006/chart" xmlns:a="http://schemas.openxmlformats.org/drawingml/2006/main" xmlns:r="http://schemas.openxmlformats.org/officeDocument/2006/relationships" xmlns:c16r2="http://schemas.microsoft.com/office/drawing/2015/06/chart">
   <c:date1904 val="0"/>
+  <c:lang val="zh-CN"/>
   <c:roundedCorners val="1"/>
+  <c:style val="2"/>
   <c:chart>
     <c:autoTitleDeleted val="1"/>
     <c:plotArea>
@@ -154,18 +161,26 @@
           <c:invertIfNegative val="0"/>
           <c:dLbls>
             <c:numFmt formatCode="#,##0" sourceLinked="0"/>
+            <c:spPr>
+              <a:noFill/>
+              <a:ln>
+                <a:noFill/>
+              </a:ln>
+              <a:effectLst/>
+            </c:spPr>
             <c:txPr>
               <a:bodyPr/>
               <a:lstStyle/>
               <a:p>
                 <a:pPr>
-                  <a:defRPr b="0" i="0" strike="noStrike" sz="1150" u="none">
+                  <a:defRPr sz="1150" b="0" i="0" u="none" strike="noStrike">
                     <a:solidFill>
                       <a:srgbClr val="1F4E79"/>
                     </a:solidFill>
                     <a:latin typeface="Microsoft YaHei"/>
                   </a:defRPr>
                 </a:pPr>
+                <a:endParaRPr lang="zh-CN"/>
               </a:p>
             </c:txPr>
             <c:showLegendKey val="0"/>
@@ -175,22 +190,25 @@
             <c:showPercent val="0"/>
             <c:showBubbleSize val="0"/>
             <c:showLeaderLines val="0"/>
+            <c:extLst>
+              <c:ext xmlns:c15="http://schemas.microsoft.com/office/drawing/2012/chart" uri="{CE6537A1-D6FC-4f65-9D91-7224C49458BB}">
+                <c15:showLeaderLines val="0"/>
+              </c:ext>
+            </c:extLst>
           </c:dLbls>
           <c:cat>
-            <c:multiLvlStrRef>
+            <c:strRef>
               <c:f>Sheet1!$A$2:$A$3</c:f>
-              <c:multiLvlStrCache>
+              <c:strCache>
                 <c:ptCount val="2"/>
-                <c:lvl>
-                  <c:pt idx="0">
-                    <c:v>可判定覆盖率（口径A）</c:v>
-                  </c:pt>
-                  <c:pt idx="1">
-                    <c:v>有输出覆盖率（口径B）</c:v>
-                  </c:pt>
-                </c:lvl>
-              </c:multiLvlStrCache>
-            </c:multiLvlStrRef>
+                <c:pt idx="0">
+                  <c:v>可判定覆盖率（口径A）</c:v>
+                </c:pt>
+                <c:pt idx="1">
+                  <c:v>有输出覆盖率（口径B）</c:v>
+                </c:pt>
+              </c:strCache>
+            </c:strRef>
           </c:cat>
           <c:val>
             <c:numRef>
@@ -199,7 +217,7 @@
                 <c:formatCode>General</c:formatCode>
                 <c:ptCount val="2"/>
                 <c:pt idx="0">
-                  <c:v>70.4</c:v>
+                  <c:v>70.400000000000006</c:v>
                 </c:pt>
                 <c:pt idx="1">
                   <c:v>54.9</c:v>
@@ -207,6 +225,11 @@
               </c:numCache>
             </c:numRef>
           </c:val>
+          <c:extLst>
+            <c:ext xmlns:c16="http://schemas.microsoft.com/office/drawing/2014/chart" uri="{C3380CC4-5D6E-409C-BE32-E72D297353CC}">
+              <c16:uniqueId val="{00000000-A8BC-48AE-A89F-2F514DEF33B6}"/>
+            </c:ext>
+          </c:extLst>
         </c:ser>
         <c:ser>
           <c:idx val="1"/>
@@ -231,18 +254,26 @@
           <c:invertIfNegative val="0"/>
           <c:dLbls>
             <c:numFmt formatCode="#,##0" sourceLinked="0"/>
+            <c:spPr>
+              <a:noFill/>
+              <a:ln>
+                <a:noFill/>
+              </a:ln>
+              <a:effectLst/>
+            </c:spPr>
             <c:txPr>
               <a:bodyPr/>
               <a:lstStyle/>
               <a:p>
                 <a:pPr>
-                  <a:defRPr b="0" i="0" strike="noStrike" sz="1150" u="none">
+                  <a:defRPr sz="1150" b="0" i="0" u="none" strike="noStrike">
                     <a:solidFill>
                       <a:srgbClr val="1F4E79"/>
                     </a:solidFill>
                     <a:latin typeface="Microsoft YaHei"/>
                   </a:defRPr>
                 </a:pPr>
+                <a:endParaRPr lang="zh-CN"/>
               </a:p>
             </c:txPr>
             <c:showLegendKey val="0"/>
@@ -252,22 +283,25 @@
             <c:showPercent val="0"/>
             <c:showBubbleSize val="0"/>
             <c:showLeaderLines val="0"/>
+            <c:extLst>
+              <c:ext xmlns:c15="http://schemas.microsoft.com/office/drawing/2012/chart" uri="{CE6537A1-D6FC-4f65-9D91-7224C49458BB}">
+                <c15:showLeaderLines val="0"/>
+              </c:ext>
+            </c:extLst>
           </c:dLbls>
           <c:cat>
-            <c:multiLvlStrRef>
+            <c:strRef>
               <c:f>Sheet1!$A$2:$A$3</c:f>
-              <c:multiLvlStrCache>
+              <c:strCache>
                 <c:ptCount val="2"/>
-                <c:lvl>
-                  <c:pt idx="0">
-                    <c:v>可判定覆盖率（口径A）</c:v>
-                  </c:pt>
-                  <c:pt idx="1">
-                    <c:v>有输出覆盖率（口径B）</c:v>
-                  </c:pt>
-                </c:lvl>
-              </c:multiLvlStrCache>
-            </c:multiLvlStrRef>
+                <c:pt idx="0">
+                  <c:v>可判定覆盖率（口径A）</c:v>
+                </c:pt>
+                <c:pt idx="1">
+                  <c:v>有输出覆盖率（口径B）</c:v>
+                </c:pt>
+              </c:strCache>
+            </c:strRef>
           </c:cat>
           <c:val>
             <c:numRef>
@@ -284,36 +318,23 @@
               </c:numCache>
             </c:numRef>
           </c:val>
+          <c:extLst>
+            <c:ext xmlns:c16="http://schemas.microsoft.com/office/drawing/2014/chart" uri="{C3380CC4-5D6E-409C-BE32-E72D297353CC}">
+              <c16:uniqueId val="{00000001-A8BC-48AE-A89F-2F514DEF33B6}"/>
+            </c:ext>
+          </c:extLst>
         </c:ser>
         <c:dLbls>
-          <c:numFmt formatCode="#,##0" sourceLinked="0"/>
-          <c:txPr>
-            <a:bodyPr/>
-            <a:lstStyle/>
-            <a:p>
-              <a:pPr>
-                <a:defRPr b="0" i="0" strike="noStrike" sz="1150" u="none">
-                  <a:solidFill>
-                    <a:srgbClr val="1F4E79"/>
-                  </a:solidFill>
-                  <a:latin typeface="Microsoft YaHei"/>
-                </a:defRPr>
-              </a:pPr>
-            </a:p>
-          </c:txPr>
           <c:showLegendKey val="0"/>
           <c:showVal val="1"/>
           <c:showCatName val="0"/>
           <c:showSerName val="0"/>
           <c:showPercent val="0"/>
           <c:showBubbleSize val="0"/>
-          <c:showLeaderLines val="0"/>
         </c:dLbls>
         <c:gapWidth val="60"/>
-        <c:overlap val="0"/>
         <c:axId val="2094734554"/>
         <c:axId val="2094734552"/>
-        <c:axId val="2094734556"/>
       </c:barChart>
       <c:catAx>
         <c:axId val="2094734554"/>
@@ -354,6 +375,7 @@
         <c:crosses val="autoZero"/>
         <c:auto val="1"/>
         <c:lblAlgn val="ctr"/>
+        <c:lblOffset val="100"/>
         <c:noMultiLvlLbl val="1"/>
       </c:catAx>
       <c:valAx>
@@ -439,6 +461,7 @@
     </c:legend>
     <c:plotVisOnly val="1"/>
     <c:dispBlanksAs val="span"/>
+    <c:showDLblsOverMax val="1"/>
   </c:chart>
   <c:spPr>
     <a:solidFill>
@@ -477,234 +500,10 @@
           <a:chExt cx="0" cy="0"/>
         </a:xfrm>
       </p:grpSpPr>
-      <p:sp>
-        <p:nvSpPr>
-          <p:cNvPr id="2" name="Header Placeholder 1"/>
-          <p:cNvSpPr>
-            <a:spLocks noGrp="1"/>
-          </p:cNvSpPr>
-          <p:nvPr>
-            <p:ph type="hdr" sz="quarter"/>
-          </p:nvPr>
-        </p:nvSpPr>
-        <p:spPr>
-          <a:xfrm>
-            <a:off x="0" y="0"/>
-            <a:ext cx="2971800" cy="458788"/>
-          </a:xfrm>
-          <a:prstGeom prst="rect">
-            <a:avLst/>
-          </a:prstGeom>
-        </p:spPr>
-        <p:txBody>
-          <a:bodyPr vert="horz" lIns="91440" tIns="45720" rIns="91440" bIns="45720" rtlCol="0"/>
-          <a:lstStyle>
-            <a:lvl1pPr algn="l">
-              <a:defRPr sz="1200"/>
-            </a:lvl1pPr>
-          </a:lstStyle>
-          <a:p>
-            <a:endParaRPr lang="en-US"/>
-          </a:p>
-        </p:txBody>
-      </p:sp>
-      <p:sp>
-        <p:nvSpPr>
-          <p:cNvPr id="3" name="Date Placeholder 2"/>
-          <p:cNvSpPr>
-            <a:spLocks noGrp="1"/>
-          </p:cNvSpPr>
-          <p:nvPr>
-            <p:ph type="dt" idx="1"/>
-          </p:nvPr>
-        </p:nvSpPr>
-        <p:spPr>
-          <a:xfrm>
-            <a:off x="3884613" y="0"/>
-            <a:ext cx="2971800" cy="458788"/>
-          </a:xfrm>
-          <a:prstGeom prst="rect">
-            <a:avLst/>
-          </a:prstGeom>
-        </p:spPr>
-        <p:txBody>
-          <a:bodyPr vert="horz" lIns="91440" tIns="45720" rIns="91440" bIns="45720" rtlCol="0"/>
-          <a:lstStyle>
-            <a:lvl1pPr algn="r">
-              <a:defRPr sz="1200"/>
-            </a:lvl1pPr>
-          </a:lstStyle>
-          <a:p>
-            <a:fld id="{5282F153-3F37-0F45-9E97-73ACFA13230C}" type="datetimeFigureOut">
-              <a:rPr lang="en-US"/>
-              <a:t>7/23/19</a:t>
-            </a:fld>
-            <a:endParaRPr lang="en-US"/>
-          </a:p>
-        </p:txBody>
-      </p:sp>
-      <p:sp>
-        <p:nvSpPr>
-          <p:cNvPr id="4" name="Slide Image Placeholder 3"/>
-          <p:cNvSpPr>
-            <a:spLocks noGrp="1" noRot="1" noChangeAspect="1"/>
-          </p:cNvSpPr>
-          <p:nvPr>
-            <p:ph type="sldImg" idx="2"/>
-          </p:nvPr>
-        </p:nvSpPr>
-        <p:spPr>
-          <a:xfrm>
-            <a:off x="685800" y="1143000"/>
-            <a:ext cx="5486400" cy="3086100"/>
-          </a:xfrm>
-          <a:prstGeom prst="rect">
-            <a:avLst/>
-          </a:prstGeom>
-          <a:noFill/>
-          <a:ln w="12700">
-            <a:solidFill>
-              <a:prstClr val="black"/>
-            </a:solidFill>
-          </a:ln>
-        </p:spPr>
-        <p:txBody>
-          <a:bodyPr vert="horz" lIns="91440" tIns="45720" rIns="91440" bIns="45720" rtlCol="0" anchor="ctr"/>
-          <a:lstStyle/>
-          <a:p>
-            <a:endParaRPr lang="en-US"/>
-          </a:p>
-        </p:txBody>
-      </p:sp>
-      <p:sp>
-        <p:nvSpPr>
-          <p:cNvPr id="5" name="Notes Placeholder 4"/>
-          <p:cNvSpPr>
-            <a:spLocks noGrp="1"/>
-          </p:cNvSpPr>
-          <p:nvPr>
-            <p:ph type="body" sz="quarter" idx="3"/>
-          </p:nvPr>
-        </p:nvSpPr>
-        <p:spPr>
-          <a:xfrm>
-            <a:off x="685800" y="4400550"/>
-            <a:ext cx="5486400" cy="3600450"/>
-          </a:xfrm>
-          <a:prstGeom prst="rect">
-            <a:avLst/>
-          </a:prstGeom>
-        </p:spPr>
-        <p:txBody>
-          <a:bodyPr vert="horz" lIns="91440" tIns="45720" rIns="91440" bIns="45720" rtlCol="0"/>
-          <a:lstStyle/>
-          <a:p>
-            <a:pPr lvl="0"/>
-            <a:r>
-              <a:rPr lang="en-US"/>
-              <a:t>Click to edit Master text styles</a:t>
-            </a:r>
-          </a:p>
-          <a:p>
-            <a:pPr lvl="1"/>
-            <a:r>
-              <a:rPr lang="en-US"/>
-              <a:t>Second level</a:t>
-            </a:r>
-          </a:p>
-          <a:p>
-            <a:pPr lvl="2"/>
-            <a:r>
-              <a:rPr lang="en-US"/>
-              <a:t>Third level</a:t>
-            </a:r>
-          </a:p>
-          <a:p>
-            <a:pPr lvl="3"/>
-            <a:r>
-              <a:rPr lang="en-US"/>
-              <a:t>Fourth level</a:t>
-            </a:r>
-          </a:p>
-          <a:p>
-            <a:pPr lvl="4"/>
-            <a:r>
-              <a:rPr lang="en-US"/>
-              <a:t>Fifth level</a:t>
-            </a:r>
-          </a:p>
-        </p:txBody>
-      </p:sp>
-      <p:sp>
-        <p:nvSpPr>
-          <p:cNvPr id="6" name="Footer Placeholder 5"/>
-          <p:cNvSpPr>
-            <a:spLocks noGrp="1"/>
-          </p:cNvSpPr>
-          <p:nvPr>
-            <p:ph type="ftr" sz="quarter" idx="4"/>
-          </p:nvPr>
-        </p:nvSpPr>
-        <p:spPr>
-          <a:xfrm>
-            <a:off x="0" y="8685213"/>
-            <a:ext cx="2971800" cy="458787"/>
-          </a:xfrm>
-          <a:prstGeom prst="rect">
-            <a:avLst/>
-          </a:prstGeom>
-        </p:spPr>
-        <p:txBody>
-          <a:bodyPr vert="horz" lIns="91440" tIns="45720" rIns="91440" bIns="45720" rtlCol="0" anchor="b"/>
-          <a:lstStyle>
-            <a:lvl1pPr algn="l">
-              <a:defRPr sz="1200"/>
-            </a:lvl1pPr>
-          </a:lstStyle>
-          <a:p>
-            <a:endParaRPr lang="en-US"/>
-          </a:p>
-        </p:txBody>
-      </p:sp>
-      <p:sp>
-        <p:nvSpPr>
-          <p:cNvPr id="7" name="Slide Number Placeholder 6"/>
-          <p:cNvSpPr>
-            <a:spLocks noGrp="1"/>
-          </p:cNvSpPr>
-          <p:nvPr>
-            <p:ph type="sldNum" sz="quarter" idx="5"/>
-          </p:nvPr>
-        </p:nvSpPr>
-        <p:spPr>
-          <a:xfrm>
-            <a:off x="3884613" y="8685213"/>
-            <a:ext cx="2971800" cy="458787"/>
-          </a:xfrm>
-          <a:prstGeom prst="rect">
-            <a:avLst/>
-          </a:prstGeom>
-        </p:spPr>
-        <p:txBody>
-          <a:bodyPr vert="horz" lIns="91440" tIns="45720" rIns="91440" bIns="45720" rtlCol="0" anchor="b"/>
-          <a:lstStyle>
-            <a:lvl1pPr algn="r">
-              <a:defRPr sz="1200"/>
-            </a:lvl1pPr>
-          </a:lstStyle>
-          <a:p>
-            <a:fld id="{CE5E9CC1-C706-0F49-92D6-E571CC5EEA8F}" type="slidenum">
-              <a:rPr lang="en-US"/>
-              <a:t>‹#›</a:t>
-            </a:fld>
-            <a:endParaRPr lang="en-US"/>
-          </a:p>
-        </p:txBody>
-      </p:sp>
     </p:spTree>
     <p:extLst>
       <p:ext uri="{BB962C8B-B14F-4D97-AF65-F5344CB8AC3E}">
-        <p14:creationId xmlns:p14="http://schemas.microsoft.com/office/powerpoint/2010/main" val="1024086991"/>
+        <p14:creationId xmlns:p14="http://schemas.microsoft.com/office/powerpoint/2010/main" val="1107001520"/>
       </p:ext>
     </p:extLst>
   </p:cSld>
@@ -852,7 +651,6 @@
               <a:rPr lang="en-US" dirty="0"/>
               <a:t>开场：一句话定位——我们在做一个让 AI 给出的每一条 PCB 设计建议都经过规则验证的系统。本次中期检查按学校要求的五个方面汇报。</a:t>
             </a:r>
-            <a:endParaRPr lang="en-US" dirty="0"/>
           </a:p>
         </p:txBody>
       </p:sp>
@@ -940,7 +738,6 @@
               <a:rPr lang="en-US" dirty="0"/>
               <a:t>讲问题的原则：每个问题都给出“定位—解法—验证”三段式，避免只列问题不给方案。指标区分度一条最能体现科研严谨性，可展开讲。</a:t>
             </a:r>
-            <a:endParaRPr lang="en-US" dirty="0"/>
           </a:p>
         </p:txBody>
       </p:sp>
@@ -1028,7 +825,6 @@
               <a:rPr lang="en-US" dirty="0"/>
               <a:t>两条主线都有明确责任人与时间点：论文由李泓达牵头、软著由林昊晞牵头、实验收尾由刘澈牵头。</a:t>
             </a:r>
-            <a:endParaRPr lang="en-US" dirty="0"/>
           </a:p>
         </p:txBody>
       </p:sp>
@@ -1116,7 +912,6 @@
               <a:rPr lang="en-US" dirty="0"/>
               <a:t>★提交前必做：把申报书预算额度与实际报销数填进左表（当前为台账口径）。“待对账”一格按财务系统数字替换。项目本质是软件研发，经费执行率低是正常情况，重点讲控费机制。</a:t>
             </a:r>
-            <a:endParaRPr lang="en-US" dirty="0"/>
           </a:p>
         </p:txBody>
       </p:sp>
@@ -1204,7 +999,6 @@
               <a:rPr lang="en-US" dirty="0"/>
               <a:t>结论页停留 during Q&amp;A。预期问题：①覆盖率口径（A/B 两口径）②为什么自研解析器（官方导出交叉验证）③论文投稿目标期刊。</a:t>
             </a:r>
-            <a:endParaRPr lang="en-US" dirty="0"/>
           </a:p>
         </p:txBody>
       </p:sp>
@@ -1288,10 +1082,6 @@
           <a:bodyPr/>
           <a:lstStyle/>
           <a:p>
-            <a:r>
-              <a:rPr lang="en-US" dirty="0"/>
-              <a:t/>
-            </a:r>
             <a:endParaRPr lang="en-US" dirty="0"/>
           </a:p>
         </p:txBody>
@@ -1380,7 +1170,6 @@
               <a:rPr lang="en-US" dirty="0"/>
               <a:t>先立靶子：项目要解决的不是“AI 能不能写代码”，而是“AI 的硬件建议可不可信”。闭环验证引擎是全项目的技术主轴，后面所有成果都围绕它展开。</a:t>
             </a:r>
-            <a:endParaRPr lang="en-US" dirty="0"/>
           </a:p>
         </p:txBody>
       </p:sp>
@@ -1468,7 +1257,6 @@
               <a:rPr lang="en-US" dirty="0"/>
               <a:t>主动说明论文滞后约一个月的原因：9 月先把实验数据做实（覆盖率与指标口径），10 月集中产出初稿——先数据后写作，避免返工。</a:t>
             </a:r>
-            <a:endParaRPr lang="en-US" dirty="0"/>
           </a:p>
         </p:txBody>
       </p:sp>
@@ -1556,7 +1344,6 @@
               <a:rPr lang="en-US" dirty="0"/>
               <a:t>强调“可用”：不是演示原型，是有 1289 项测试、可打包安装、按工作区管理会话的完整软件。右图为软著手册同款真实截图。</a:t>
             </a:r>
-            <a:endParaRPr lang="en-US" dirty="0"/>
           </a:p>
         </p:txBody>
       </p:sp>
@@ -1644,7 +1431,6 @@
               <a:rPr lang="en-US" dirty="0"/>
               <a:t>这是全项目最核心的一页。每个数字都能在实验目录下复现；答辩追问时口径：收敛率按 BOM 变更类建议计，100% 指 blocking 级新增违规消除。</a:t>
             </a:r>
-            <a:endParaRPr lang="en-US" dirty="0"/>
           </a:p>
         </p:txBody>
       </p:sp>
@@ -1732,7 +1518,6 @@
               <a:rPr lang="en-US" dirty="0"/>
               <a:t>口径要讲清：A=规则真的执行了判断，B=实际报出违规。71 条规则全部可判定；两条口径都能一键复现，不是数字灌水。</a:t>
             </a:r>
-            <a:endParaRPr lang="en-US" dirty="0"/>
           </a:p>
         </p:txBody>
       </p:sp>
@@ -1820,7 +1605,6 @@
               <a:rPr lang="en-US" dirty="0"/>
               <a:t>三个数字对应三类同学的工作：成员B的模型线、性能专项、以及全员的质量底线。BERT 升级同时保留了关键词与云端兜底，短命令由模板覆盖。</a:t>
             </a:r>
-            <a:endParaRPr lang="en-US" dirty="0"/>
           </a:p>
         </p:txBody>
       </p:sp>
@@ -1908,7 +1692,6 @@
               <a:rPr lang="en-US" dirty="0"/>
               <a:t>论文今天刚出初稿、尚未提交 git；软著按学校流程走完提交即可。若评委问论文进度：已进入导师审阅阶段。</a:t>
             </a:r>
-            <a:endParaRPr lang="en-US" dirty="0"/>
           </a:p>
         </p:txBody>
       </p:sp>
@@ -1981,6 +1764,11 @@
 <file path=ppt/slideMasters/slideMaster1.xml><?xml version="1.0" encoding="utf-8"?>
 <p:sldMaster xmlns:a="http://schemas.openxmlformats.org/drawingml/2006/main" xmlns:r="http://schemas.openxmlformats.org/officeDocument/2006/relationships" xmlns:p="http://schemas.openxmlformats.org/presentationml/2006/main">
   <p:cSld>
+    <p:bg>
+      <p:bgRef idx="1001">
+        <a:schemeClr val="bg1"/>
+      </p:bgRef>
+    </p:bg>
     <p:spTree>
       <p:nvGrpSpPr>
         <p:cNvPr id="1" name=""/>
@@ -2263,6 +2051,7 @@
         <a:solidFill>
           <a:srgbClr val="1F4E79"/>
         </a:solidFill>
+        <a:effectLst/>
       </p:bgPr>
     </p:bg>
     <p:spTree>
@@ -2300,11 +2089,11 @@
           <a:bodyPr wrap="square" lIns="0" tIns="0" rIns="0" bIns="0" rtlCol="0" anchor="ctr"/>
           <a:lstStyle/>
           <a:p>
-            <a:pPr indent="0" marL="0">
-              <a:buNone/>
-            </a:pPr>
-            <a:r>
-              <a:rPr lang="en-US" sz="1600" spc="200" kern="0" dirty="0">
+            <a:pPr marL="0" indent="0">
+              <a:buNone/>
+            </a:pPr>
+            <a:r>
+              <a:rPr lang="en-US" sz="1600" kern="0" spc="200" dirty="0">
                 <a:solidFill>
                   <a:srgbClr val="A9C6E8"/>
                 </a:solidFill>
@@ -2339,7 +2128,7 @@
           <a:bodyPr wrap="square" lIns="0" tIns="0" rIns="0" bIns="0" rtlCol="0" anchor="ctr"/>
           <a:lstStyle/>
           <a:p>
-            <a:pPr indent="0" marL="0">
+            <a:pPr marL="0" indent="0">
               <a:buNone/>
             </a:pPr>
             <a:r>
@@ -2378,7 +2167,7 @@
           <a:bodyPr wrap="square" lIns="0" tIns="0" rIns="0" bIns="0" rtlCol="0" anchor="ctr"/>
           <a:lstStyle/>
           <a:p>
-            <a:pPr indent="0" marL="0">
+            <a:pPr marL="0" indent="0">
               <a:buNone/>
             </a:pPr>
             <a:r>
@@ -2420,6 +2209,13 @@
             <a:prstDash val="solid"/>
           </a:ln>
         </p:spPr>
+        <p:txBody>
+          <a:bodyPr/>
+          <a:lstStyle/>
+          <a:p>
+            <a:endParaRPr lang="zh-CN" altLang="en-US"/>
+          </a:p>
+        </p:txBody>
       </p:sp>
       <p:sp>
         <p:nvSpPr>
@@ -2442,7 +2238,7 @@
           <a:bodyPr wrap="square" lIns="0" tIns="0" rIns="0" bIns="0" rtlCol="0" anchor="ctr"/>
           <a:lstStyle/>
           <a:p>
-            <a:pPr indent="0" marL="0">
+            <a:pPr marL="0" indent="0">
               <a:spcAft>
                 <a:spcPts val="600"/>
               </a:spcAft>
@@ -2462,7 +2258,7 @@
             <a:endParaRPr lang="en-US" sz="1500" dirty="0"/>
           </a:p>
           <a:p>
-            <a:pPr indent="0" marL="0">
+            <a:pPr marL="0" indent="0">
               <a:spcAft>
                 <a:spcPts val="600"/>
               </a:spcAft>
@@ -2504,7 +2300,7 @@
           <a:bodyPr wrap="square" lIns="0" tIns="0" rIns="0" bIns="0" rtlCol="0" anchor="ctr"/>
           <a:lstStyle/>
           <a:p>
-            <a:pPr indent="0" marL="0">
+            <a:pPr marL="0" indent="0">
               <a:buNone/>
             </a:pPr>
             <a:r>
@@ -2543,7 +2339,7 @@
           <a:bodyPr wrap="square" lIns="0" tIns="0" rIns="0" bIns="0" rtlCol="0" anchor="ctr"/>
           <a:lstStyle/>
           <a:p>
-            <a:pPr indent="0" marL="0">
+            <a:pPr marL="0" indent="0">
               <a:buNone/>
             </a:pPr>
             <a:r>
@@ -2577,6 +2373,7 @@
         <a:solidFill>
           <a:srgbClr val="FFFFFF"/>
         </a:solidFill>
+        <a:effectLst/>
       </p:bgPr>
     </p:bg>
     <p:spTree>
@@ -2614,11 +2411,11 @@
           <a:bodyPr wrap="square" lIns="0" tIns="0" rIns="0" bIns="0" rtlCol="0" anchor="ctr"/>
           <a:lstStyle/>
           <a:p>
-            <a:pPr indent="0" marL="0">
-              <a:buNone/>
-            </a:pPr>
-            <a:r>
-              <a:rPr lang="en-US" sz="1200" b="1" spc="200" kern="0" dirty="0">
+            <a:pPr marL="0" indent="0">
+              <a:buNone/>
+            </a:pPr>
+            <a:r>
+              <a:rPr lang="en-US" sz="1200" b="1" kern="0" spc="200" dirty="0">
                 <a:solidFill>
                   <a:srgbClr val="2E75B6"/>
                 </a:solidFill>
@@ -2653,7 +2450,7 @@
           <a:bodyPr wrap="square" lIns="0" tIns="0" rIns="0" bIns="0" rtlCol="0" anchor="t"/>
           <a:lstStyle/>
           <a:p>
-            <a:pPr indent="0" marL="0">
+            <a:pPr marL="0" indent="0">
               <a:buNone/>
             </a:pPr>
             <a:r>
@@ -2687,16 +2484,34 @@
         </p:nvGraphicFramePr>
         <p:xfrm>
           <a:off x="457200" y="1325880"/>
-          <a:ext cx="11274552" cy="914400"/>
+          <a:ext cx="11274552" cy="4133088"/>
         </p:xfrm>
         <a:graphic>
           <a:graphicData uri="http://schemas.openxmlformats.org/drawingml/2006/table">
             <a:tbl>
               <a:tblPr/>
               <a:tblGrid>
-                <a:gridCol w="3566160"/>
-                <a:gridCol w="3931920"/>
-                <a:gridCol w="3776472"/>
+                <a:gridCol w="3566160">
+                  <a:extLst>
+                    <a:ext uri="{9D8B030D-6E8A-4147-A177-3AD203B41FA5}">
+                      <a16:colId xmlns:a16="http://schemas.microsoft.com/office/drawing/2014/main" val="20000"/>
+                    </a:ext>
+                  </a:extLst>
+                </a:gridCol>
+                <a:gridCol w="3931920">
+                  <a:extLst>
+                    <a:ext uri="{9D8B030D-6E8A-4147-A177-3AD203B41FA5}">
+                      <a16:colId xmlns:a16="http://schemas.microsoft.com/office/drawing/2014/main" val="20001"/>
+                    </a:ext>
+                  </a:extLst>
+                </a:gridCol>
+                <a:gridCol w="3776472">
+                  <a:extLst>
+                    <a:ext uri="{9D8B030D-6E8A-4147-A177-3AD203B41FA5}">
+                      <a16:colId xmlns:a16="http://schemas.microsoft.com/office/drawing/2014/main" val="20002"/>
+                    </a:ext>
+                  </a:extLst>
+                </a:gridCol>
               </a:tblGrid>
               <a:tr h="384048">
                 <a:tc>
@@ -2704,7 +2519,7 @@
                     <a:bodyPr/>
                     <a:lstStyle/>
                     <a:p>
-                      <a:pPr indent="0" marL="0">
+                      <a:pPr marL="0" indent="0">
                         <a:buNone/>
                       </a:pPr>
                       <a:r>
@@ -2772,7 +2587,7 @@
                     <a:bodyPr/>
                     <a:lstStyle/>
                     <a:p>
-                      <a:pPr indent="0" marL="0">
+                      <a:pPr marL="0" indent="0">
                         <a:buNone/>
                       </a:pPr>
                       <a:r>
@@ -2840,7 +2655,7 @@
                     <a:bodyPr/>
                     <a:lstStyle/>
                     <a:p>
-                      <a:pPr indent="0" marL="0">
+                      <a:pPr marL="0" indent="0">
                         <a:buNone/>
                       </a:pPr>
                       <a:r>
@@ -2903,6 +2718,11 @@
                     </a:solidFill>
                   </a:tcPr>
                 </a:tc>
+                <a:extLst>
+                  <a:ext uri="{0D108BD9-81ED-4DB2-BD59-A6C34878D82A}">
+                    <a16:rowId xmlns:a16="http://schemas.microsoft.com/office/drawing/2014/main" val="10000"/>
+                  </a:ext>
+                </a:extLst>
               </a:tr>
               <a:tr h="749808">
                 <a:tc>
@@ -2910,7 +2730,7 @@
                     <a:bodyPr/>
                     <a:lstStyle/>
                     <a:p>
-                      <a:pPr indent="0" marL="0">
+                      <a:pPr marL="0" indent="0">
                         <a:buNone/>
                       </a:pPr>
                       <a:r>
@@ -2978,7 +2798,7 @@
                     <a:bodyPr/>
                     <a:lstStyle/>
                     <a:p>
-                      <a:pPr indent="0" marL="0">
+                      <a:pPr marL="0" indent="0">
                         <a:buNone/>
                       </a:pPr>
                       <a:r>
@@ -3046,7 +2866,7 @@
                     <a:bodyPr/>
                     <a:lstStyle/>
                     <a:p>
-                      <a:pPr indent="0" marL="0">
+                      <a:pPr marL="0" indent="0">
                         <a:buNone/>
                       </a:pPr>
                       <a:r>
@@ -3109,6 +2929,11 @@
                     </a:solidFill>
                   </a:tcPr>
                 </a:tc>
+                <a:extLst>
+                  <a:ext uri="{0D108BD9-81ED-4DB2-BD59-A6C34878D82A}">
+                    <a16:rowId xmlns:a16="http://schemas.microsoft.com/office/drawing/2014/main" val="10001"/>
+                  </a:ext>
+                </a:extLst>
               </a:tr>
               <a:tr h="749808">
                 <a:tc>
@@ -3116,7 +2941,7 @@
                     <a:bodyPr/>
                     <a:lstStyle/>
                     <a:p>
-                      <a:pPr indent="0" marL="0">
+                      <a:pPr marL="0" indent="0">
                         <a:buNone/>
                       </a:pPr>
                       <a:r>
@@ -3184,7 +3009,7 @@
                     <a:bodyPr/>
                     <a:lstStyle/>
                     <a:p>
-                      <a:pPr indent="0" marL="0">
+                      <a:pPr marL="0" indent="0">
                         <a:buNone/>
                       </a:pPr>
                       <a:r>
@@ -3252,7 +3077,7 @@
                     <a:bodyPr/>
                     <a:lstStyle/>
                     <a:p>
-                      <a:pPr indent="0" marL="0">
+                      <a:pPr marL="0" indent="0">
                         <a:buNone/>
                       </a:pPr>
                       <a:r>
@@ -3315,6 +3140,11 @@
                     </a:solidFill>
                   </a:tcPr>
                 </a:tc>
+                <a:extLst>
+                  <a:ext uri="{0D108BD9-81ED-4DB2-BD59-A6C34878D82A}">
+                    <a16:rowId xmlns:a16="http://schemas.microsoft.com/office/drawing/2014/main" val="10002"/>
+                  </a:ext>
+                </a:extLst>
               </a:tr>
               <a:tr h="749808">
                 <a:tc>
@@ -3322,7 +3152,7 @@
                     <a:bodyPr/>
                     <a:lstStyle/>
                     <a:p>
-                      <a:pPr indent="0" marL="0">
+                      <a:pPr marL="0" indent="0">
                         <a:buNone/>
                       </a:pPr>
                       <a:r>
@@ -3390,7 +3220,7 @@
                     <a:bodyPr/>
                     <a:lstStyle/>
                     <a:p>
-                      <a:pPr indent="0" marL="0">
+                      <a:pPr marL="0" indent="0">
                         <a:buNone/>
                       </a:pPr>
                       <a:r>
@@ -3458,7 +3288,7 @@
                     <a:bodyPr/>
                     <a:lstStyle/>
                     <a:p>
-                      <a:pPr indent="0" marL="0">
+                      <a:pPr marL="0" indent="0">
                         <a:buNone/>
                       </a:pPr>
                       <a:r>
@@ -3521,6 +3351,11 @@
                     </a:solidFill>
                   </a:tcPr>
                 </a:tc>
+                <a:extLst>
+                  <a:ext uri="{0D108BD9-81ED-4DB2-BD59-A6C34878D82A}">
+                    <a16:rowId xmlns:a16="http://schemas.microsoft.com/office/drawing/2014/main" val="10003"/>
+                  </a:ext>
+                </a:extLst>
               </a:tr>
               <a:tr h="749808">
                 <a:tc>
@@ -3528,7 +3363,7 @@
                     <a:bodyPr/>
                     <a:lstStyle/>
                     <a:p>
-                      <a:pPr indent="0" marL="0">
+                      <a:pPr marL="0" indent="0">
                         <a:buNone/>
                       </a:pPr>
                       <a:r>
@@ -3596,7 +3431,7 @@
                     <a:bodyPr/>
                     <a:lstStyle/>
                     <a:p>
-                      <a:pPr indent="0" marL="0">
+                      <a:pPr marL="0" indent="0">
                         <a:buNone/>
                       </a:pPr>
                       <a:r>
@@ -3664,7 +3499,7 @@
                     <a:bodyPr/>
                     <a:lstStyle/>
                     <a:p>
-                      <a:pPr indent="0" marL="0">
+                      <a:pPr marL="0" indent="0">
                         <a:buNone/>
                       </a:pPr>
                       <a:r>
@@ -3727,6 +3562,11 @@
                     </a:solidFill>
                   </a:tcPr>
                 </a:tc>
+                <a:extLst>
+                  <a:ext uri="{0D108BD9-81ED-4DB2-BD59-A6C34878D82A}">
+                    <a16:rowId xmlns:a16="http://schemas.microsoft.com/office/drawing/2014/main" val="10004"/>
+                  </a:ext>
+                </a:extLst>
               </a:tr>
               <a:tr h="749808">
                 <a:tc>
@@ -3734,7 +3574,7 @@
                     <a:bodyPr/>
                     <a:lstStyle/>
                     <a:p>
-                      <a:pPr indent="0" marL="0">
+                      <a:pPr marL="0" indent="0">
                         <a:buNone/>
                       </a:pPr>
                       <a:r>
@@ -3802,7 +3642,7 @@
                     <a:bodyPr/>
                     <a:lstStyle/>
                     <a:p>
-                      <a:pPr indent="0" marL="0">
+                      <a:pPr marL="0" indent="0">
                         <a:buNone/>
                       </a:pPr>
                       <a:r>
@@ -3870,7 +3710,7 @@
                     <a:bodyPr/>
                     <a:lstStyle/>
                     <a:p>
-                      <a:pPr indent="0" marL="0">
+                      <a:pPr marL="0" indent="0">
                         <a:buNone/>
                       </a:pPr>
                       <a:r>
@@ -3933,6 +3773,11 @@
                     </a:solidFill>
                   </a:tcPr>
                 </a:tc>
+                <a:extLst>
+                  <a:ext uri="{0D108BD9-81ED-4DB2-BD59-A6C34878D82A}">
+                    <a16:rowId xmlns:a16="http://schemas.microsoft.com/office/drawing/2014/main" val="10005"/>
+                  </a:ext>
+                </a:extLst>
               </a:tr>
             </a:tbl>
           </a:graphicData>
@@ -3959,7 +3804,7 @@
           <a:bodyPr wrap="square" lIns="0" tIns="0" rIns="0" bIns="0" rtlCol="0" anchor="ctr"/>
           <a:lstStyle/>
           <a:p>
-            <a:pPr indent="0" marL="0">
+            <a:pPr marL="0" indent="0">
               <a:buNone/>
             </a:pPr>
             <a:r>
@@ -3973,9 +3818,6 @@
               </a:rPr>
               <a:t>遗留事项：</a:t>
             </a:r>
-            <a:pPr indent="0" marL="0">
-              <a:buNone/>
-            </a:pPr>
             <a:r>
               <a:rPr lang="en-US" sz="1300" dirty="0">
                 <a:solidFill>
@@ -4012,7 +3854,7 @@
           <a:bodyPr wrap="square" lIns="0" tIns="0" rIns="0" bIns="0" rtlCol="0" anchor="ctr"/>
           <a:lstStyle/>
           <a:p>
-            <a:pPr algn="r" indent="0" marL="0">
+            <a:pPr marL="0" indent="0" algn="r">
               <a:buNone/>
             </a:pPr>
             <a:r>
@@ -4046,6 +3888,7 @@
         <a:solidFill>
           <a:srgbClr val="FFFFFF"/>
         </a:solidFill>
+        <a:effectLst/>
       </p:bgPr>
     </p:bg>
     <p:spTree>
@@ -4083,11 +3926,11 @@
           <a:bodyPr wrap="square" lIns="0" tIns="0" rIns="0" bIns="0" rtlCol="0" anchor="ctr"/>
           <a:lstStyle/>
           <a:p>
-            <a:pPr indent="0" marL="0">
-              <a:buNone/>
-            </a:pPr>
-            <a:r>
-              <a:rPr lang="en-US" sz="1200" b="1" spc="200" kern="0" dirty="0">
+            <a:pPr marL="0" indent="0">
+              <a:buNone/>
+            </a:pPr>
+            <a:r>
+              <a:rPr lang="en-US" sz="1200" b="1" kern="0" spc="200" dirty="0">
                 <a:solidFill>
                   <a:srgbClr val="2E75B6"/>
                 </a:solidFill>
@@ -4122,7 +3965,7 @@
           <a:bodyPr wrap="square" lIns="0" tIns="0" rIns="0" bIns="0" rtlCol="0" anchor="t"/>
           <a:lstStyle/>
           <a:p>
-            <a:pPr indent="0" marL="0">
+            <a:pPr marL="0" indent="0">
               <a:buNone/>
             </a:pPr>
             <a:r>
@@ -4166,6 +4009,13 @@
             <a:prstDash val="solid"/>
           </a:ln>
         </p:spPr>
+        <p:txBody>
+          <a:bodyPr/>
+          <a:lstStyle/>
+          <a:p>
+            <a:endParaRPr lang="zh-CN" altLang="en-US"/>
+          </a:p>
+        </p:txBody>
       </p:sp>
       <p:sp>
         <p:nvSpPr>
@@ -4188,7 +4038,7 @@
           <a:bodyPr wrap="square" lIns="0" tIns="0" rIns="0" bIns="0" rtlCol="0" anchor="t"/>
           <a:lstStyle/>
           <a:p>
-            <a:pPr indent="0" marL="0">
+            <a:pPr marL="0" indent="0">
               <a:spcAft>
                 <a:spcPts val="500"/>
               </a:spcAft>
@@ -4208,7 +4058,7 @@
             <a:endParaRPr lang="en-US" sz="1250" dirty="0"/>
           </a:p>
           <a:p>
-            <a:pPr indent="0" marL="0">
+            <a:pPr marL="0" indent="0">
               <a:spcAft>
                 <a:spcPts val="500"/>
               </a:spcAft>
@@ -4228,7 +4078,7 @@
             <a:endParaRPr lang="en-US" sz="1250" dirty="0"/>
           </a:p>
           <a:p>
-            <a:pPr indent="0" marL="0">
+            <a:pPr marL="0" indent="0">
               <a:spcAft>
                 <a:spcPts val="500"/>
               </a:spcAft>
@@ -4270,7 +4120,7 @@
           <a:bodyPr wrap="square" lIns="0" tIns="0" rIns="0" bIns="0" rtlCol="0" anchor="ctr"/>
           <a:lstStyle/>
           <a:p>
-            <a:pPr algn="ctr" indent="0" marL="0">
+            <a:pPr marL="0" indent="0" algn="ctr">
               <a:buNone/>
             </a:pPr>
             <a:r>
@@ -4314,6 +4164,13 @@
             <a:prstDash val="solid"/>
           </a:ln>
         </p:spPr>
+        <p:txBody>
+          <a:bodyPr/>
+          <a:lstStyle/>
+          <a:p>
+            <a:endParaRPr lang="zh-CN" altLang="en-US"/>
+          </a:p>
+        </p:txBody>
       </p:sp>
       <p:sp>
         <p:nvSpPr>
@@ -4336,7 +4193,7 @@
           <a:bodyPr wrap="square" lIns="0" tIns="0" rIns="0" bIns="0" rtlCol="0" anchor="t"/>
           <a:lstStyle/>
           <a:p>
-            <a:pPr indent="0" marL="0">
+            <a:pPr marL="0" indent="0">
               <a:spcAft>
                 <a:spcPts val="500"/>
               </a:spcAft>
@@ -4356,7 +4213,7 @@
             <a:endParaRPr lang="en-US" sz="1250" dirty="0"/>
           </a:p>
           <a:p>
-            <a:pPr indent="0" marL="0">
+            <a:pPr marL="0" indent="0">
               <a:spcAft>
                 <a:spcPts val="500"/>
               </a:spcAft>
@@ -4376,7 +4233,7 @@
             <a:endParaRPr lang="en-US" sz="1250" dirty="0"/>
           </a:p>
           <a:p>
-            <a:pPr indent="0" marL="0">
+            <a:pPr marL="0" indent="0">
               <a:spcAft>
                 <a:spcPts val="500"/>
               </a:spcAft>
@@ -4418,7 +4275,7 @@
           <a:bodyPr wrap="square" lIns="0" tIns="0" rIns="0" bIns="0" rtlCol="0" anchor="ctr"/>
           <a:lstStyle/>
           <a:p>
-            <a:pPr algn="ctr" indent="0" marL="0">
+            <a:pPr marL="0" indent="0" algn="ctr">
               <a:buNone/>
             </a:pPr>
             <a:r>
@@ -4462,6 +4319,13 @@
             <a:prstDash val="solid"/>
           </a:ln>
         </p:spPr>
+        <p:txBody>
+          <a:bodyPr/>
+          <a:lstStyle/>
+          <a:p>
+            <a:endParaRPr lang="zh-CN" altLang="en-US"/>
+          </a:p>
+        </p:txBody>
       </p:sp>
       <p:sp>
         <p:nvSpPr>
@@ -4484,7 +4348,7 @@
           <a:bodyPr wrap="square" lIns="0" tIns="0" rIns="0" bIns="0" rtlCol="0" anchor="t"/>
           <a:lstStyle/>
           <a:p>
-            <a:pPr indent="0" marL="0">
+            <a:pPr marL="0" indent="0">
               <a:spcAft>
                 <a:spcPts val="500"/>
               </a:spcAft>
@@ -4504,7 +4368,7 @@
             <a:endParaRPr lang="en-US" sz="1250" dirty="0"/>
           </a:p>
           <a:p>
-            <a:pPr indent="0" marL="0">
+            <a:pPr marL="0" indent="0">
               <a:spcAft>
                 <a:spcPts val="500"/>
               </a:spcAft>
@@ -4524,7 +4388,7 @@
             <a:endParaRPr lang="en-US" sz="1250" dirty="0"/>
           </a:p>
           <a:p>
-            <a:pPr indent="0" marL="0">
+            <a:pPr marL="0" indent="0">
               <a:spcAft>
                 <a:spcPts val="500"/>
               </a:spcAft>
@@ -4566,7 +4430,7 @@
           <a:bodyPr wrap="square" lIns="0" tIns="0" rIns="0" bIns="0" rtlCol="0" anchor="ctr"/>
           <a:lstStyle/>
           <a:p>
-            <a:pPr algn="ctr" indent="0" marL="0">
+            <a:pPr marL="0" indent="0" algn="ctr">
               <a:buNone/>
             </a:pPr>
             <a:r>
@@ -4610,6 +4474,13 @@
             <a:prstDash val="solid"/>
           </a:ln>
         </p:spPr>
+        <p:txBody>
+          <a:bodyPr/>
+          <a:lstStyle/>
+          <a:p>
+            <a:endParaRPr lang="zh-CN" altLang="en-US"/>
+          </a:p>
+        </p:txBody>
       </p:sp>
       <p:sp>
         <p:nvSpPr>
@@ -4632,7 +4503,7 @@
           <a:bodyPr wrap="square" lIns="0" tIns="0" rIns="0" bIns="0" rtlCol="0" anchor="t"/>
           <a:lstStyle/>
           <a:p>
-            <a:pPr indent="0" marL="0">
+            <a:pPr marL="0" indent="0">
               <a:spcAft>
                 <a:spcPts val="500"/>
               </a:spcAft>
@@ -4652,7 +4523,7 @@
             <a:endParaRPr lang="en-US" sz="1250" dirty="0"/>
           </a:p>
           <a:p>
-            <a:pPr indent="0" marL="0">
+            <a:pPr marL="0" indent="0">
               <a:spcAft>
                 <a:spcPts val="500"/>
               </a:spcAft>
@@ -4672,7 +4543,7 @@
             <a:endParaRPr lang="en-US" sz="1250" dirty="0"/>
           </a:p>
           <a:p>
-            <a:pPr indent="0" marL="0">
+            <a:pPr marL="0" indent="0">
               <a:spcAft>
                 <a:spcPts val="500"/>
               </a:spcAft>
@@ -4719,6 +4590,13 @@
             <a:prstDash val="solid"/>
           </a:ln>
         </p:spPr>
+        <p:txBody>
+          <a:bodyPr/>
+          <a:lstStyle/>
+          <a:p>
+            <a:endParaRPr lang="zh-CN" altLang="en-US"/>
+          </a:p>
+        </p:txBody>
       </p:sp>
       <p:sp>
         <p:nvSpPr>
@@ -4741,7 +4619,7 @@
           <a:bodyPr wrap="square" lIns="0" tIns="0" rIns="0" bIns="0" rtlCol="0" anchor="ctr"/>
           <a:lstStyle/>
           <a:p>
-            <a:pPr indent="0" marL="0">
+            <a:pPr marL="0" indent="0">
               <a:buNone/>
             </a:pPr>
             <a:r>
@@ -4886,7 +4764,7 @@
           <a:bodyPr wrap="square" lIns="0" tIns="0" rIns="0" bIns="0" rtlCol="0" anchor="ctr"/>
           <a:lstStyle/>
           <a:p>
-            <a:pPr algn="r" indent="0" marL="0">
+            <a:pPr marL="0" indent="0" algn="r">
               <a:buNone/>
             </a:pPr>
             <a:r>
@@ -4920,6 +4798,7 @@
         <a:solidFill>
           <a:srgbClr val="FFFFFF"/>
         </a:solidFill>
+        <a:effectLst/>
       </p:bgPr>
     </p:bg>
     <p:spTree>
@@ -4957,11 +4836,11 @@
           <a:bodyPr wrap="square" lIns="0" tIns="0" rIns="0" bIns="0" rtlCol="0" anchor="ctr"/>
           <a:lstStyle/>
           <a:p>
-            <a:pPr indent="0" marL="0">
-              <a:buNone/>
-            </a:pPr>
-            <a:r>
-              <a:rPr lang="en-US" sz="1200" b="1" spc="200" kern="0" dirty="0">
+            <a:pPr marL="0" indent="0">
+              <a:buNone/>
+            </a:pPr>
+            <a:r>
+              <a:rPr lang="en-US" sz="1200" b="1" kern="0" spc="200" dirty="0">
                 <a:solidFill>
                   <a:srgbClr val="2E75B6"/>
                 </a:solidFill>
@@ -4996,7 +4875,7 @@
           <a:bodyPr wrap="square" lIns="0" tIns="0" rIns="0" bIns="0" rtlCol="0" anchor="t"/>
           <a:lstStyle/>
           <a:p>
-            <a:pPr indent="0" marL="0">
+            <a:pPr marL="0" indent="0">
               <a:buNone/>
             </a:pPr>
             <a:r>
@@ -5030,16 +4909,34 @@
         </p:nvGraphicFramePr>
         <p:xfrm>
           <a:off x="457200" y="1371600"/>
-          <a:ext cx="6812280" cy="914400"/>
+          <a:ext cx="6812280" cy="4297680"/>
         </p:xfrm>
         <a:graphic>
           <a:graphicData uri="http://schemas.openxmlformats.org/drawingml/2006/table">
             <a:tbl>
               <a:tblPr/>
               <a:tblGrid>
-                <a:gridCol w="1874520"/>
-                <a:gridCol w="1051560"/>
-                <a:gridCol w="3886200"/>
+                <a:gridCol w="1874520">
+                  <a:extLst>
+                    <a:ext uri="{9D8B030D-6E8A-4147-A177-3AD203B41FA5}">
+                      <a16:colId xmlns:a16="http://schemas.microsoft.com/office/drawing/2014/main" val="20000"/>
+                    </a:ext>
+                  </a:extLst>
+                </a:gridCol>
+                <a:gridCol w="1051560">
+                  <a:extLst>
+                    <a:ext uri="{9D8B030D-6E8A-4147-A177-3AD203B41FA5}">
+                      <a16:colId xmlns:a16="http://schemas.microsoft.com/office/drawing/2014/main" val="20001"/>
+                    </a:ext>
+                  </a:extLst>
+                </a:gridCol>
+                <a:gridCol w="3886200">
+                  <a:extLst>
+                    <a:ext uri="{9D8B030D-6E8A-4147-A177-3AD203B41FA5}">
+                      <a16:colId xmlns:a16="http://schemas.microsoft.com/office/drawing/2014/main" val="20002"/>
+                    </a:ext>
+                  </a:extLst>
+                </a:gridCol>
               </a:tblGrid>
               <a:tr h="411480">
                 <a:tc>
@@ -5047,7 +4944,7 @@
                     <a:bodyPr/>
                     <a:lstStyle/>
                     <a:p>
-                      <a:pPr indent="0" marL="0">
+                      <a:pPr marL="0" indent="0">
                         <a:buNone/>
                       </a:pPr>
                       <a:r>
@@ -5115,7 +5012,7 @@
                     <a:bodyPr/>
                     <a:lstStyle/>
                     <a:p>
-                      <a:pPr algn="ctr" indent="0" marL="0">
+                      <a:pPr marL="0" indent="0" algn="ctr">
                         <a:buNone/>
                       </a:pPr>
                       <a:r>
@@ -5183,7 +5080,7 @@
                     <a:bodyPr/>
                     <a:lstStyle/>
                     <a:p>
-                      <a:pPr indent="0" marL="0">
+                      <a:pPr marL="0" indent="0">
                         <a:buNone/>
                       </a:pPr>
                       <a:r>
@@ -5246,6 +5143,11 @@
                     </a:solidFill>
                   </a:tcPr>
                 </a:tc>
+                <a:extLst>
+                  <a:ext uri="{0D108BD9-81ED-4DB2-BD59-A6C34878D82A}">
+                    <a16:rowId xmlns:a16="http://schemas.microsoft.com/office/drawing/2014/main" val="10000"/>
+                  </a:ext>
+                </a:extLst>
               </a:tr>
               <a:tr h="777240">
                 <a:tc>
@@ -5253,7 +5155,7 @@
                     <a:bodyPr/>
                     <a:lstStyle/>
                     <a:p>
-                      <a:pPr algn="l" indent="0" marL="0">
+                      <a:pPr marL="0" indent="0" algn="l">
                         <a:buNone/>
                       </a:pPr>
                       <a:r>
@@ -5321,7 +5223,7 @@
                     <a:bodyPr/>
                     <a:lstStyle/>
                     <a:p>
-                      <a:pPr algn="ctr" indent="0" marL="0">
+                      <a:pPr marL="0" indent="0" algn="ctr">
                         <a:buNone/>
                       </a:pPr>
                       <a:r>
@@ -5389,7 +5291,7 @@
                     <a:bodyPr/>
                     <a:lstStyle/>
                     <a:p>
-                      <a:pPr algn="l" indent="0" marL="0">
+                      <a:pPr marL="0" indent="0" algn="l">
                         <a:buNone/>
                       </a:pPr>
                       <a:r>
@@ -5452,6 +5354,11 @@
                     </a:solidFill>
                   </a:tcPr>
                 </a:tc>
+                <a:extLst>
+                  <a:ext uri="{0D108BD9-81ED-4DB2-BD59-A6C34878D82A}">
+                    <a16:rowId xmlns:a16="http://schemas.microsoft.com/office/drawing/2014/main" val="10001"/>
+                  </a:ext>
+                </a:extLst>
               </a:tr>
               <a:tr h="777240">
                 <a:tc>
@@ -5459,7 +5366,7 @@
                     <a:bodyPr/>
                     <a:lstStyle/>
                     <a:p>
-                      <a:pPr algn="l" indent="0" marL="0">
+                      <a:pPr marL="0" indent="0" algn="l">
                         <a:buNone/>
                       </a:pPr>
                       <a:r>
@@ -5527,7 +5434,7 @@
                     <a:bodyPr/>
                     <a:lstStyle/>
                     <a:p>
-                      <a:pPr algn="ctr" indent="0" marL="0">
+                      <a:pPr marL="0" indent="0" algn="ctr">
                         <a:buNone/>
                       </a:pPr>
                       <a:r>
@@ -5595,7 +5502,7 @@
                     <a:bodyPr/>
                     <a:lstStyle/>
                     <a:p>
-                      <a:pPr algn="l" indent="0" marL="0">
+                      <a:pPr marL="0" indent="0" algn="l">
                         <a:buNone/>
                       </a:pPr>
                       <a:r>
@@ -5658,6 +5565,11 @@
                     </a:solidFill>
                   </a:tcPr>
                 </a:tc>
+                <a:extLst>
+                  <a:ext uri="{0D108BD9-81ED-4DB2-BD59-A6C34878D82A}">
+                    <a16:rowId xmlns:a16="http://schemas.microsoft.com/office/drawing/2014/main" val="10002"/>
+                  </a:ext>
+                </a:extLst>
               </a:tr>
               <a:tr h="777240">
                 <a:tc>
@@ -5665,7 +5577,7 @@
                     <a:bodyPr/>
                     <a:lstStyle/>
                     <a:p>
-                      <a:pPr algn="l" indent="0" marL="0">
+                      <a:pPr marL="0" indent="0" algn="l">
                         <a:buNone/>
                       </a:pPr>
                       <a:r>
@@ -5733,7 +5645,7 @@
                     <a:bodyPr/>
                     <a:lstStyle/>
                     <a:p>
-                      <a:pPr algn="ctr" indent="0" marL="0">
+                      <a:pPr marL="0" indent="0" algn="ctr">
                         <a:buNone/>
                       </a:pPr>
                       <a:r>
@@ -5801,7 +5713,7 @@
                     <a:bodyPr/>
                     <a:lstStyle/>
                     <a:p>
-                      <a:pPr algn="l" indent="0" marL="0">
+                      <a:pPr marL="0" indent="0" algn="l">
                         <a:buNone/>
                       </a:pPr>
                       <a:r>
@@ -5864,6 +5776,11 @@
                     </a:solidFill>
                   </a:tcPr>
                 </a:tc>
+                <a:extLst>
+                  <a:ext uri="{0D108BD9-81ED-4DB2-BD59-A6C34878D82A}">
+                    <a16:rowId xmlns:a16="http://schemas.microsoft.com/office/drawing/2014/main" val="10003"/>
+                  </a:ext>
+                </a:extLst>
               </a:tr>
               <a:tr h="777240">
                 <a:tc>
@@ -5871,7 +5788,7 @@
                     <a:bodyPr/>
                     <a:lstStyle/>
                     <a:p>
-                      <a:pPr algn="l" indent="0" marL="0">
+                      <a:pPr marL="0" indent="0" algn="l">
                         <a:buNone/>
                       </a:pPr>
                       <a:r>
@@ -5939,7 +5856,7 @@
                     <a:bodyPr/>
                     <a:lstStyle/>
                     <a:p>
-                      <a:pPr algn="ctr" indent="0" marL="0">
+                      <a:pPr marL="0" indent="0" algn="ctr">
                         <a:buNone/>
                       </a:pPr>
                       <a:r>
@@ -6007,7 +5924,7 @@
                     <a:bodyPr/>
                     <a:lstStyle/>
                     <a:p>
-                      <a:pPr algn="l" indent="0" marL="0">
+                      <a:pPr marL="0" indent="0" algn="l">
                         <a:buNone/>
                       </a:pPr>
                       <a:r>
@@ -6070,6 +5987,11 @@
                     </a:solidFill>
                   </a:tcPr>
                 </a:tc>
+                <a:extLst>
+                  <a:ext uri="{0D108BD9-81ED-4DB2-BD59-A6C34878D82A}">
+                    <a16:rowId xmlns:a16="http://schemas.microsoft.com/office/drawing/2014/main" val="10004"/>
+                  </a:ext>
+                </a:extLst>
               </a:tr>
               <a:tr h="777240">
                 <a:tc>
@@ -6077,7 +5999,7 @@
                     <a:bodyPr/>
                     <a:lstStyle/>
                     <a:p>
-                      <a:pPr algn="l" indent="0" marL="0">
+                      <a:pPr marL="0" indent="0" algn="l">
                         <a:buNone/>
                       </a:pPr>
                       <a:r>
@@ -6145,7 +6067,7 @@
                     <a:bodyPr/>
                     <a:lstStyle/>
                     <a:p>
-                      <a:pPr algn="ctr" indent="0" marL="0">
+                      <a:pPr marL="0" indent="0" algn="ctr">
                         <a:buNone/>
                       </a:pPr>
                       <a:r>
@@ -6213,7 +6135,7 @@
                     <a:bodyPr/>
                     <a:lstStyle/>
                     <a:p>
-                      <a:pPr algn="l" indent="0" marL="0">
+                      <a:pPr marL="0" indent="0" algn="l">
                         <a:buNone/>
                       </a:pPr>
                       <a:r>
@@ -6276,6 +6198,11 @@
                     </a:solidFill>
                   </a:tcPr>
                 </a:tc>
+                <a:extLst>
+                  <a:ext uri="{0D108BD9-81ED-4DB2-BD59-A6C34878D82A}">
+                    <a16:rowId xmlns:a16="http://schemas.microsoft.com/office/drawing/2014/main" val="10005"/>
+                  </a:ext>
+                </a:extLst>
               </a:tr>
             </a:tbl>
           </a:graphicData>
@@ -6302,7 +6229,7 @@
           <a:bodyPr wrap="square" lIns="0" tIns="0" rIns="0" bIns="0" rtlCol="0" anchor="ctr"/>
           <a:lstStyle/>
           <a:p>
-            <a:pPr indent="0" marL="0">
+            <a:pPr marL="0" indent="0">
               <a:buNone/>
             </a:pPr>
             <a:r>
@@ -6431,6 +6358,13 @@
             <a:prstDash val="solid"/>
           </a:ln>
         </p:spPr>
+        <p:txBody>
+          <a:bodyPr/>
+          <a:lstStyle/>
+          <a:p>
+            <a:endParaRPr lang="zh-CN" altLang="en-US"/>
+          </a:p>
+        </p:txBody>
       </p:sp>
       <p:sp>
         <p:nvSpPr>
@@ -6453,7 +6387,7 @@
           <a:bodyPr wrap="square" lIns="0" tIns="0" rIns="0" bIns="0" rtlCol="0" anchor="ctr"/>
           <a:lstStyle/>
           <a:p>
-            <a:pPr indent="0" marL="0">
+            <a:pPr marL="0" indent="0">
               <a:buNone/>
             </a:pPr>
             <a:r>
@@ -6492,7 +6426,7 @@
           <a:bodyPr wrap="square" lIns="0" tIns="0" rIns="0" bIns="0" rtlCol="0" anchor="ctr"/>
           <a:lstStyle/>
           <a:p>
-            <a:pPr algn="r" indent="0" marL="0">
+            <a:pPr marL="0" indent="0" algn="r">
               <a:buNone/>
             </a:pPr>
             <a:r>
@@ -6526,6 +6460,7 @@
         <a:solidFill>
           <a:srgbClr val="1F4E79"/>
         </a:solidFill>
+        <a:effectLst/>
       </p:bgPr>
     </p:bg>
     <p:spTree>
@@ -6563,7 +6498,7 @@
           <a:bodyPr wrap="square" lIns="0" tIns="0" rIns="0" bIns="0" rtlCol="0" anchor="ctr"/>
           <a:lstStyle/>
           <a:p>
-            <a:pPr indent="0" marL="0">
+            <a:pPr marL="0" indent="0">
               <a:buNone/>
             </a:pPr>
             <a:r>
@@ -6605,6 +6540,13 @@
             <a:prstDash val="solid"/>
           </a:ln>
         </p:spPr>
+        <p:txBody>
+          <a:bodyPr/>
+          <a:lstStyle/>
+          <a:p>
+            <a:endParaRPr lang="zh-CN" altLang="en-US"/>
+          </a:p>
+        </p:txBody>
       </p:sp>
       <p:sp>
         <p:nvSpPr>
@@ -6627,7 +6569,7 @@
           <a:bodyPr wrap="square" lIns="0" tIns="0" rIns="0" bIns="0" rtlCol="0" anchor="t"/>
           <a:lstStyle/>
           <a:p>
-            <a:pPr indent="0" marL="0">
+            <a:pPr marL="0" indent="0">
               <a:spcAft>
                 <a:spcPts val="2000"/>
               </a:spcAft>
@@ -6644,13 +6586,38 @@
               </a:rPr>
               <a:t>1. 执行情况：</a:t>
             </a:r>
-            <a:pPr indent="0" marL="0">
+            <a:r>
+              <a:rPr lang="en-US" sz="1650" dirty="0">
+                <a:solidFill>
+                  <a:srgbClr val="CADCFC"/>
+                </a:solidFill>
+                <a:latin typeface="Microsoft YaHei" pitchFamily="34" charset="0"/>
+                <a:ea typeface="Microsoft YaHei" pitchFamily="34" charset="-122"/>
+                <a:cs typeface="Microsoft YaHei" pitchFamily="34" charset="-120"/>
+              </a:rPr>
+              <a:t>总体按立项计划推进，技术路线未偏离；唯一滞后的论文节点已于 10 月补齐 18 页初稿</a:t>
+            </a:r>
+            <a:endParaRPr lang="en-US" sz="1650" dirty="0"/>
+          </a:p>
+          <a:p>
+            <a:pPr marL="0" indent="0">
               <a:spcAft>
                 <a:spcPts val="2000"/>
               </a:spcAft>
               <a:buNone/>
             </a:pPr>
             <a:r>
+              <a:rPr lang="en-US" sz="1650" b="1" dirty="0">
+                <a:solidFill>
+                  <a:srgbClr val="FFFFFF"/>
+                </a:solidFill>
+                <a:latin typeface="Microsoft YaHei" pitchFamily="34" charset="0"/>
+                <a:ea typeface="Microsoft YaHei" pitchFamily="34" charset="-122"/>
+                <a:cs typeface="Microsoft YaHei" pitchFamily="34" charset="-120"/>
+              </a:rPr>
+              <a:t>2. 阶段性成果：</a:t>
+            </a:r>
+            <a:r>
               <a:rPr lang="en-US" sz="1650" dirty="0">
                 <a:solidFill>
                   <a:srgbClr val="CADCFC"/>
@@ -6659,12 +6626,12 @@
                 <a:ea typeface="Microsoft YaHei" pitchFamily="34" charset="-122"/>
                 <a:cs typeface="Microsoft YaHei" pitchFamily="34" charset="-120"/>
               </a:rPr>
-              <a:t>总体按立项计划推进，技术路线未偏离；唯一滞后的论文节点已于 10 月补齐 18 页初稿</a:t>
+              <a:t>系统 v0.8 建成可用；闭环实验收敛率 94.2%、危险建议消除率 100%、缺陷检出 95.7%，五项指标全面超越立项目标</a:t>
             </a:r>
             <a:endParaRPr lang="en-US" sz="1650" dirty="0"/>
           </a:p>
           <a:p>
-            <a:pPr indent="0" marL="0">
+            <a:pPr marL="0" indent="0">
               <a:spcAft>
                 <a:spcPts val="2000"/>
               </a:spcAft>
@@ -6679,35 +6646,29 @@
                 <a:ea typeface="Microsoft YaHei" pitchFamily="34" charset="-122"/>
                 <a:cs typeface="Microsoft YaHei" pitchFamily="34" charset="-120"/>
               </a:rPr>
-              <a:t>2. 阶段性成果：</a:t>
-            </a:r>
-            <a:pPr indent="0" marL="0">
+              <a:t>3. 问题与解决：</a:t>
+            </a:r>
+            <a:r>
+              <a:rPr lang="en-US" sz="1650" dirty="0">
+                <a:solidFill>
+                  <a:srgbClr val="CADCFC"/>
+                </a:solidFill>
+                <a:latin typeface="Microsoft YaHei" pitchFamily="34" charset="0"/>
+                <a:ea typeface="Microsoft YaHei" pitchFamily="34" charset="-122"/>
+                <a:cs typeface="Microsoft YaHei" pitchFamily="34" charset="-120"/>
+              </a:rPr>
+              <a:t>幻觉、数据、误报、指标口径、离线化五大问题全部闭环，解法均经 155 个真实设计数据验证</a:t>
+            </a:r>
+            <a:endParaRPr lang="en-US" sz="1650" dirty="0"/>
+          </a:p>
+          <a:p>
+            <a:pPr marL="0" indent="0">
               <a:spcAft>
                 <a:spcPts val="2000"/>
               </a:spcAft>
               <a:buNone/>
             </a:pPr>
             <a:r>
-              <a:rPr lang="en-US" sz="1650" dirty="0">
-                <a:solidFill>
-                  <a:srgbClr val="CADCFC"/>
-                </a:solidFill>
-                <a:latin typeface="Microsoft YaHei" pitchFamily="34" charset="0"/>
-                <a:ea typeface="Microsoft YaHei" pitchFamily="34" charset="-122"/>
-                <a:cs typeface="Microsoft YaHei" pitchFamily="34" charset="-120"/>
-              </a:rPr>
-              <a:t>系统 v0.8 建成可用；闭环实验收敛率 94.2%、危险建议消除率 100%、缺陷检出 95.7%，五项指标全面超越立项目标</a:t>
-            </a:r>
-            <a:endParaRPr lang="en-US" sz="1650" dirty="0"/>
-          </a:p>
-          <a:p>
-            <a:pPr indent="0" marL="0">
-              <a:spcAft>
-                <a:spcPts val="2000"/>
-              </a:spcAft>
-              <a:buNone/>
-            </a:pPr>
-            <a:r>
               <a:rPr lang="en-US" sz="1650" b="1" dirty="0">
                 <a:solidFill>
                   <a:srgbClr val="FFFFFF"/>
@@ -6716,51 +6677,8 @@
                 <a:ea typeface="Microsoft YaHei" pitchFamily="34" charset="-122"/>
                 <a:cs typeface="Microsoft YaHei" pitchFamily="34" charset="-120"/>
               </a:rPr>
-              <a:t>3. 问题与解决：</a:t>
-            </a:r>
-            <a:pPr indent="0" marL="0">
-              <a:spcAft>
-                <a:spcPts val="2000"/>
-              </a:spcAft>
-              <a:buNone/>
-            </a:pPr>
-            <a:r>
-              <a:rPr lang="en-US" sz="1650" dirty="0">
-                <a:solidFill>
-                  <a:srgbClr val="CADCFC"/>
-                </a:solidFill>
-                <a:latin typeface="Microsoft YaHei" pitchFamily="34" charset="0"/>
-                <a:ea typeface="Microsoft YaHei" pitchFamily="34" charset="-122"/>
-                <a:cs typeface="Microsoft YaHei" pitchFamily="34" charset="-120"/>
-              </a:rPr>
-              <a:t>幻觉、数据、误报、指标口径、离线化五大问题全部闭环，解法均经 155 个真实设计数据验证</a:t>
-            </a:r>
-            <a:endParaRPr lang="en-US" sz="1650" dirty="0"/>
-          </a:p>
-          <a:p>
-            <a:pPr indent="0" marL="0">
-              <a:spcAft>
-                <a:spcPts val="2000"/>
-              </a:spcAft>
-              <a:buNone/>
-            </a:pPr>
-            <a:r>
-              <a:rPr lang="en-US" sz="1650" b="1" dirty="0">
-                <a:solidFill>
-                  <a:srgbClr val="FFFFFF"/>
-                </a:solidFill>
-                <a:latin typeface="Microsoft YaHei" pitchFamily="34" charset="0"/>
-                <a:ea typeface="Microsoft YaHei" pitchFamily="34" charset="-122"/>
-                <a:cs typeface="Microsoft YaHei" pitchFamily="34" charset="-120"/>
-              </a:rPr>
               <a:t>4. 下阶段：</a:t>
             </a:r>
-            <a:pPr indent="0" marL="0">
-              <a:spcAft>
-                <a:spcPts val="2000"/>
-              </a:spcAft>
-              <a:buNone/>
-            </a:pPr>
             <a:r>
               <a:rPr lang="en-US" sz="1650" dirty="0">
                 <a:solidFill>
@@ -6797,7 +6715,7 @@
           <a:bodyPr wrap="square" lIns="0" tIns="0" rIns="0" bIns="0" rtlCol="0" anchor="ctr"/>
           <a:lstStyle/>
           <a:p>
-            <a:pPr indent="0" marL="0">
+            <a:pPr marL="0" indent="0">
               <a:buNone/>
             </a:pPr>
             <a:r>
@@ -6831,6 +6749,7 @@
         <a:solidFill>
           <a:srgbClr val="FFFFFF"/>
         </a:solidFill>
+        <a:effectLst/>
       </p:bgPr>
     </p:bg>
     <p:spTree>
@@ -6868,7 +6787,7 @@
           <a:bodyPr wrap="square" lIns="0" tIns="0" rIns="0" bIns="0" rtlCol="0" anchor="t"/>
           <a:lstStyle/>
           <a:p>
-            <a:pPr indent="0" marL="0">
+            <a:pPr marL="0" indent="0">
               <a:buNone/>
             </a:pPr>
             <a:r>
@@ -6907,7 +6826,7 @@
           <a:bodyPr wrap="square" lIns="0" tIns="0" rIns="0" bIns="0" rtlCol="0" anchor="ctr"/>
           <a:lstStyle/>
           <a:p>
-            <a:pPr indent="0" marL="0">
+            <a:pPr marL="0" indent="0">
               <a:buNone/>
             </a:pPr>
             <a:r>
@@ -6946,7 +6865,7 @@
           <a:bodyPr wrap="square" lIns="0" tIns="0" rIns="0" bIns="0" rtlCol="0" anchor="t"/>
           <a:lstStyle/>
           <a:p>
-            <a:pPr indent="0" marL="0">
+            <a:pPr marL="0" indent="0">
               <a:buNone/>
             </a:pPr>
             <a:r>
@@ -6963,7 +6882,7 @@
             <a:endParaRPr lang="en-US" sz="1800" dirty="0"/>
           </a:p>
           <a:p>
-            <a:pPr indent="0" marL="0">
+            <a:pPr marL="0" indent="0">
               <a:buNone/>
             </a:pPr>
             <a:r>
@@ -7002,7 +6921,7 @@
           <a:bodyPr wrap="square" lIns="0" tIns="0" rIns="0" bIns="0" rtlCol="0" anchor="ctr"/>
           <a:lstStyle/>
           <a:p>
-            <a:pPr indent="0" marL="0">
+            <a:pPr marL="0" indent="0">
               <a:buNone/>
             </a:pPr>
             <a:r>
@@ -7041,7 +6960,7 @@
           <a:bodyPr wrap="square" lIns="0" tIns="0" rIns="0" bIns="0" rtlCol="0" anchor="t"/>
           <a:lstStyle/>
           <a:p>
-            <a:pPr indent="0" marL="0">
+            <a:pPr marL="0" indent="0">
               <a:buNone/>
             </a:pPr>
             <a:r>
@@ -7058,7 +6977,7 @@
             <a:endParaRPr lang="en-US" sz="1800" dirty="0"/>
           </a:p>
           <a:p>
-            <a:pPr indent="0" marL="0">
+            <a:pPr marL="0" indent="0">
               <a:buNone/>
             </a:pPr>
             <a:r>
@@ -7097,7 +7016,7 @@
           <a:bodyPr wrap="square" lIns="0" tIns="0" rIns="0" bIns="0" rtlCol="0" anchor="ctr"/>
           <a:lstStyle/>
           <a:p>
-            <a:pPr indent="0" marL="0">
+            <a:pPr marL="0" indent="0">
               <a:buNone/>
             </a:pPr>
             <a:r>
@@ -7136,7 +7055,7 @@
           <a:bodyPr wrap="square" lIns="0" tIns="0" rIns="0" bIns="0" rtlCol="0" anchor="t"/>
           <a:lstStyle/>
           <a:p>
-            <a:pPr indent="0" marL="0">
+            <a:pPr marL="0" indent="0">
               <a:buNone/>
             </a:pPr>
             <a:r>
@@ -7153,7 +7072,7 @@
             <a:endParaRPr lang="en-US" sz="1800" dirty="0"/>
           </a:p>
           <a:p>
-            <a:pPr indent="0" marL="0">
+            <a:pPr marL="0" indent="0">
               <a:buNone/>
             </a:pPr>
             <a:r>
@@ -7192,7 +7111,7 @@
           <a:bodyPr wrap="square" lIns="0" tIns="0" rIns="0" bIns="0" rtlCol="0" anchor="ctr"/>
           <a:lstStyle/>
           <a:p>
-            <a:pPr indent="0" marL="0">
+            <a:pPr marL="0" indent="0">
               <a:buNone/>
             </a:pPr>
             <a:r>
@@ -7231,7 +7150,7 @@
           <a:bodyPr wrap="square" lIns="0" tIns="0" rIns="0" bIns="0" rtlCol="0" anchor="t"/>
           <a:lstStyle/>
           <a:p>
-            <a:pPr indent="0" marL="0">
+            <a:pPr marL="0" indent="0">
               <a:buNone/>
             </a:pPr>
             <a:r>
@@ -7248,7 +7167,7 @@
             <a:endParaRPr lang="en-US" sz="1800" dirty="0"/>
           </a:p>
           <a:p>
-            <a:pPr indent="0" marL="0">
+            <a:pPr marL="0" indent="0">
               <a:buNone/>
             </a:pPr>
             <a:r>
@@ -7287,7 +7206,7 @@
           <a:bodyPr wrap="square" lIns="0" tIns="0" rIns="0" bIns="0" rtlCol="0" anchor="ctr"/>
           <a:lstStyle/>
           <a:p>
-            <a:pPr indent="0" marL="0">
+            <a:pPr marL="0" indent="0">
               <a:buNone/>
             </a:pPr>
             <a:r>
@@ -7326,7 +7245,7 @@
           <a:bodyPr wrap="square" lIns="0" tIns="0" rIns="0" bIns="0" rtlCol="0" anchor="t"/>
           <a:lstStyle/>
           <a:p>
-            <a:pPr indent="0" marL="0">
+            <a:pPr marL="0" indent="0">
               <a:buNone/>
             </a:pPr>
             <a:r>
@@ -7343,7 +7262,7 @@
             <a:endParaRPr lang="en-US" sz="1800" dirty="0"/>
           </a:p>
           <a:p>
-            <a:pPr indent="0" marL="0">
+            <a:pPr marL="0" indent="0">
               <a:buNone/>
             </a:pPr>
             <a:r>
@@ -7387,6 +7306,13 @@
             <a:prstDash val="solid"/>
           </a:ln>
         </p:spPr>
+        <p:txBody>
+          <a:bodyPr/>
+          <a:lstStyle/>
+          <a:p>
+            <a:endParaRPr lang="zh-CN" altLang="en-US"/>
+          </a:p>
+        </p:txBody>
       </p:sp>
       <p:sp>
         <p:nvSpPr>
@@ -7409,7 +7335,7 @@
           <a:bodyPr wrap="square" lIns="0" tIns="0" rIns="0" bIns="0" rtlCol="0" anchor="ctr"/>
           <a:lstStyle/>
           <a:p>
-            <a:pPr indent="0" marL="0">
+            <a:pPr marL="0" indent="0">
               <a:buNone/>
             </a:pPr>
             <a:r>
@@ -7448,7 +7374,7 @@
           <a:bodyPr wrap="square" lIns="0" tIns="0" rIns="0" bIns="0" rtlCol="0" anchor="t"/>
           <a:lstStyle/>
           <a:p>
-            <a:pPr indent="0" marL="0">
+            <a:pPr marL="0" indent="0">
               <a:spcAft>
                 <a:spcPts val="800"/>
               </a:spcAft>
@@ -7468,7 +7394,7 @@
             <a:endParaRPr lang="en-US" sz="1250" dirty="0"/>
           </a:p>
           <a:p>
-            <a:pPr indent="0" marL="0">
+            <a:pPr marL="0" indent="0">
               <a:spcAft>
                 <a:spcPts val="800"/>
               </a:spcAft>
@@ -7488,7 +7414,7 @@
             <a:endParaRPr lang="en-US" sz="1250" dirty="0"/>
           </a:p>
           <a:p>
-            <a:pPr indent="0" marL="0">
+            <a:pPr marL="0" indent="0">
               <a:spcAft>
                 <a:spcPts val="800"/>
               </a:spcAft>
@@ -7508,7 +7434,7 @@
             <a:endParaRPr lang="en-US" sz="1250" dirty="0"/>
           </a:p>
           <a:p>
-            <a:pPr indent="0" marL="0">
+            <a:pPr marL="0" indent="0">
               <a:spcAft>
                 <a:spcPts val="800"/>
               </a:spcAft>
@@ -7528,7 +7454,7 @@
             <a:endParaRPr lang="en-US" sz="1250" dirty="0"/>
           </a:p>
           <a:p>
-            <a:pPr indent="0" marL="0">
+            <a:pPr marL="0" indent="0">
               <a:spcAft>
                 <a:spcPts val="800"/>
               </a:spcAft>
@@ -7548,7 +7474,7 @@
             <a:endParaRPr lang="en-US" sz="1250" dirty="0"/>
           </a:p>
           <a:p>
-            <a:pPr indent="0" marL="0">
+            <a:pPr marL="0" indent="0">
               <a:spcAft>
                 <a:spcPts val="800"/>
               </a:spcAft>
@@ -7568,7 +7494,7 @@
             <a:endParaRPr lang="en-US" sz="1250" dirty="0"/>
           </a:p>
           <a:p>
-            <a:pPr indent="0" marL="0">
+            <a:pPr marL="0" indent="0">
               <a:spcAft>
                 <a:spcPts val="800"/>
               </a:spcAft>
@@ -7588,7 +7514,7 @@
             <a:endParaRPr lang="en-US" sz="1250" dirty="0"/>
           </a:p>
           <a:p>
-            <a:pPr indent="0" marL="0">
+            <a:pPr marL="0" indent="0">
               <a:spcAft>
                 <a:spcPts val="800"/>
               </a:spcAft>
@@ -7608,7 +7534,7 @@
             <a:endParaRPr lang="en-US" sz="1250" dirty="0"/>
           </a:p>
           <a:p>
-            <a:pPr indent="0" marL="0">
+            <a:pPr marL="0" indent="0">
               <a:spcAft>
                 <a:spcPts val="800"/>
               </a:spcAft>
@@ -7628,7 +7554,7 @@
             <a:endParaRPr lang="en-US" sz="1250" dirty="0"/>
           </a:p>
           <a:p>
-            <a:pPr indent="0" marL="0">
+            <a:pPr marL="0" indent="0">
               <a:spcAft>
                 <a:spcPts val="800"/>
               </a:spcAft>
@@ -7648,7 +7574,7 @@
             <a:endParaRPr lang="en-US" sz="1250" dirty="0"/>
           </a:p>
           <a:p>
-            <a:pPr indent="0" marL="0">
+            <a:pPr marL="0" indent="0">
               <a:spcAft>
                 <a:spcPts val="800"/>
               </a:spcAft>
@@ -7668,7 +7594,7 @@
             <a:endParaRPr lang="en-US" sz="1250" dirty="0"/>
           </a:p>
           <a:p>
-            <a:pPr indent="0" marL="0">
+            <a:pPr marL="0" indent="0">
               <a:spcAft>
                 <a:spcPts val="800"/>
               </a:spcAft>
@@ -7710,7 +7636,7 @@
           <a:bodyPr wrap="square" lIns="0" tIns="0" rIns="0" bIns="0" rtlCol="0" anchor="ctr"/>
           <a:lstStyle/>
           <a:p>
-            <a:pPr algn="r" indent="0" marL="0">
+            <a:pPr marL="0" indent="0" algn="r">
               <a:buNone/>
             </a:pPr>
             <a:r>
@@ -7744,6 +7670,7 @@
         <a:solidFill>
           <a:srgbClr val="FFFFFF"/>
         </a:solidFill>
+        <a:effectLst/>
       </p:bgPr>
     </p:bg>
     <p:spTree>
@@ -7781,11 +7708,11 @@
           <a:bodyPr wrap="square" lIns="0" tIns="0" rIns="0" bIns="0" rtlCol="0" anchor="ctr"/>
           <a:lstStyle/>
           <a:p>
-            <a:pPr indent="0" marL="0">
-              <a:buNone/>
-            </a:pPr>
-            <a:r>
-              <a:rPr lang="en-US" sz="1200" b="1" spc="200" kern="0" dirty="0">
+            <a:pPr marL="0" indent="0">
+              <a:buNone/>
+            </a:pPr>
+            <a:r>
+              <a:rPr lang="en-US" sz="1200" b="1" kern="0" spc="200" dirty="0">
                 <a:solidFill>
                   <a:srgbClr val="2E75B6"/>
                 </a:solidFill>
@@ -7820,7 +7747,7 @@
           <a:bodyPr wrap="square" lIns="0" tIns="0" rIns="0" bIns="0" rtlCol="0" anchor="t"/>
           <a:lstStyle/>
           <a:p>
-            <a:pPr indent="0" marL="0">
+            <a:pPr marL="0" indent="0">
               <a:buNone/>
             </a:pPr>
             <a:r>
@@ -7859,7 +7786,7 @@
           <a:bodyPr wrap="square" lIns="0" tIns="0" rIns="0" bIns="0" rtlCol="0" anchor="ctr"/>
           <a:lstStyle/>
           <a:p>
-            <a:pPr indent="0" marL="0">
+            <a:pPr marL="0" indent="0">
               <a:buNone/>
             </a:pPr>
             <a:r>
@@ -7983,7 +7910,7 @@
           <a:bodyPr wrap="square" lIns="0" tIns="0" rIns="0" bIns="0" rtlCol="0" anchor="ctr"/>
           <a:lstStyle/>
           <a:p>
-            <a:pPr indent="0" marL="0">
+            <a:pPr marL="0" indent="0">
               <a:buNone/>
             </a:pPr>
             <a:r>
@@ -8027,6 +7954,13 @@
             <a:prstDash val="solid"/>
           </a:ln>
         </p:spPr>
+        <p:txBody>
+          <a:bodyPr/>
+          <a:lstStyle/>
+          <a:p>
+            <a:endParaRPr lang="zh-CN" altLang="en-US"/>
+          </a:p>
+        </p:txBody>
       </p:sp>
       <p:sp>
         <p:nvSpPr>
@@ -8049,7 +7983,7 @@
           <a:bodyPr wrap="square" lIns="0" tIns="0" rIns="0" bIns="0" rtlCol="0" anchor="ctr"/>
           <a:lstStyle/>
           <a:p>
-            <a:pPr indent="0" marL="0">
+            <a:pPr marL="0" indent="0">
               <a:buNone/>
             </a:pPr>
             <a:r>
@@ -8088,7 +8022,7 @@
           <a:bodyPr wrap="square" lIns="0" tIns="0" rIns="0" bIns="0" rtlCol="0" anchor="ctr"/>
           <a:lstStyle/>
           <a:p>
-            <a:pPr algn="ctr" indent="0" marL="0">
+            <a:pPr marL="0" indent="0" algn="ctr">
               <a:buNone/>
             </a:pPr>
             <a:r>
@@ -8132,6 +8066,13 @@
             <a:prstDash val="solid"/>
           </a:ln>
         </p:spPr>
+        <p:txBody>
+          <a:bodyPr/>
+          <a:lstStyle/>
+          <a:p>
+            <a:endParaRPr lang="zh-CN" altLang="en-US"/>
+          </a:p>
+        </p:txBody>
       </p:sp>
       <p:sp>
         <p:nvSpPr>
@@ -8154,7 +8095,7 @@
           <a:bodyPr wrap="square" lIns="0" tIns="0" rIns="0" bIns="0" rtlCol="0" anchor="ctr"/>
           <a:lstStyle/>
           <a:p>
-            <a:pPr indent="0" marL="0">
+            <a:pPr marL="0" indent="0">
               <a:buNone/>
             </a:pPr>
             <a:r>
@@ -8193,7 +8134,7 @@
           <a:bodyPr wrap="square" lIns="0" tIns="0" rIns="0" bIns="0" rtlCol="0" anchor="ctr"/>
           <a:lstStyle/>
           <a:p>
-            <a:pPr algn="ctr" indent="0" marL="0">
+            <a:pPr marL="0" indent="0" algn="ctr">
               <a:buNone/>
             </a:pPr>
             <a:r>
@@ -8237,6 +8178,13 @@
             <a:prstDash val="solid"/>
           </a:ln>
         </p:spPr>
+        <p:txBody>
+          <a:bodyPr/>
+          <a:lstStyle/>
+          <a:p>
+            <a:endParaRPr lang="zh-CN" altLang="en-US"/>
+          </a:p>
+        </p:txBody>
       </p:sp>
       <p:sp>
         <p:nvSpPr>
@@ -8259,7 +8207,7 @@
           <a:bodyPr wrap="square" lIns="0" tIns="0" rIns="0" bIns="0" rtlCol="0" anchor="ctr"/>
           <a:lstStyle/>
           <a:p>
-            <a:pPr indent="0" marL="0">
+            <a:pPr marL="0" indent="0">
               <a:buNone/>
             </a:pPr>
             <a:r>
@@ -8298,7 +8246,7 @@
           <a:bodyPr wrap="square" lIns="0" tIns="0" rIns="0" bIns="0" rtlCol="0" anchor="ctr"/>
           <a:lstStyle/>
           <a:p>
-            <a:pPr algn="ctr" indent="0" marL="0">
+            <a:pPr marL="0" indent="0" algn="ctr">
               <a:buNone/>
             </a:pPr>
             <a:r>
@@ -8342,6 +8290,13 @@
             <a:prstDash val="solid"/>
           </a:ln>
         </p:spPr>
+        <p:txBody>
+          <a:bodyPr/>
+          <a:lstStyle/>
+          <a:p>
+            <a:endParaRPr lang="zh-CN" altLang="en-US"/>
+          </a:p>
+        </p:txBody>
       </p:sp>
       <p:sp>
         <p:nvSpPr>
@@ -8364,7 +8319,7 @@
           <a:bodyPr wrap="square" lIns="0" tIns="0" rIns="0" bIns="0" rtlCol="0" anchor="ctr"/>
           <a:lstStyle/>
           <a:p>
-            <a:pPr indent="0" marL="0">
+            <a:pPr marL="0" indent="0">
               <a:buNone/>
             </a:pPr>
             <a:r>
@@ -8408,6 +8363,13 @@
             <a:prstDash val="solid"/>
           </a:ln>
         </p:spPr>
+        <p:txBody>
+          <a:bodyPr/>
+          <a:lstStyle/>
+          <a:p>
+            <a:endParaRPr lang="zh-CN" altLang="en-US"/>
+          </a:p>
+        </p:txBody>
       </p:sp>
       <p:sp>
         <p:nvSpPr>
@@ -8430,7 +8392,7 @@
           <a:bodyPr wrap="square" lIns="0" tIns="0" rIns="0" bIns="0" rtlCol="0" anchor="ctr"/>
           <a:lstStyle/>
           <a:p>
-            <a:pPr indent="0" marL="0">
+            <a:pPr marL="0" indent="0">
               <a:buNone/>
             </a:pPr>
             <a:r>
@@ -8444,9 +8406,6 @@
               </a:rPr>
               <a:t>立项产出目标：</a:t>
             </a:r>
-            <a:pPr indent="0" marL="0">
-              <a:buNone/>
-            </a:pPr>
             <a:r>
               <a:rPr lang="en-US" sz="1450" dirty="0">
                 <a:solidFill>
@@ -8483,7 +8442,7 @@
           <a:bodyPr wrap="square" lIns="0" tIns="0" rIns="0" bIns="0" rtlCol="0" anchor="ctr"/>
           <a:lstStyle/>
           <a:p>
-            <a:pPr indent="0" marL="0">
+            <a:pPr marL="0" indent="0">
               <a:buNone/>
             </a:pPr>
             <a:r>
@@ -8522,7 +8481,7 @@
           <a:bodyPr wrap="square" lIns="0" tIns="0" rIns="0" bIns="0" rtlCol="0" anchor="ctr"/>
           <a:lstStyle/>
           <a:p>
-            <a:pPr algn="r" indent="0" marL="0">
+            <a:pPr marL="0" indent="0" algn="r">
               <a:buNone/>
             </a:pPr>
             <a:r>
@@ -8556,6 +8515,7 @@
         <a:solidFill>
           <a:srgbClr val="FFFFFF"/>
         </a:solidFill>
+        <a:effectLst/>
       </p:bgPr>
     </p:bg>
     <p:spTree>
@@ -8593,11 +8553,11 @@
           <a:bodyPr wrap="square" lIns="0" tIns="0" rIns="0" bIns="0" rtlCol="0" anchor="ctr"/>
           <a:lstStyle/>
           <a:p>
-            <a:pPr indent="0" marL="0">
-              <a:buNone/>
-            </a:pPr>
-            <a:r>
-              <a:rPr lang="en-US" sz="1200" b="1" spc="200" kern="0" dirty="0">
+            <a:pPr marL="0" indent="0">
+              <a:buNone/>
+            </a:pPr>
+            <a:r>
+              <a:rPr lang="en-US" sz="1200" b="1" kern="0" spc="200" dirty="0">
                 <a:solidFill>
                   <a:srgbClr val="2E75B6"/>
                 </a:solidFill>
@@ -8632,7 +8592,7 @@
           <a:bodyPr wrap="square" lIns="0" tIns="0" rIns="0" bIns="0" rtlCol="0" anchor="t"/>
           <a:lstStyle/>
           <a:p>
-            <a:pPr indent="0" marL="0">
+            <a:pPr marL="0" indent="0">
               <a:buNone/>
             </a:pPr>
             <a:r>
@@ -8666,17 +8626,41 @@
         </p:nvGraphicFramePr>
         <p:xfrm>
           <a:off x="457200" y="1325880"/>
-          <a:ext cx="11274552" cy="914400"/>
+          <a:ext cx="11274552" cy="4023360"/>
         </p:xfrm>
         <a:graphic>
           <a:graphicData uri="http://schemas.openxmlformats.org/drawingml/2006/table">
             <a:tbl>
               <a:tblPr/>
               <a:tblGrid>
-                <a:gridCol w="2880360"/>
-                <a:gridCol w="1417320"/>
-                <a:gridCol w="5513832"/>
-                <a:gridCol w="1463040"/>
+                <a:gridCol w="2880360">
+                  <a:extLst>
+                    <a:ext uri="{9D8B030D-6E8A-4147-A177-3AD203B41FA5}">
+                      <a16:colId xmlns:a16="http://schemas.microsoft.com/office/drawing/2014/main" val="20000"/>
+                    </a:ext>
+                  </a:extLst>
+                </a:gridCol>
+                <a:gridCol w="1417320">
+                  <a:extLst>
+                    <a:ext uri="{9D8B030D-6E8A-4147-A177-3AD203B41FA5}">
+                      <a16:colId xmlns:a16="http://schemas.microsoft.com/office/drawing/2014/main" val="20001"/>
+                    </a:ext>
+                  </a:extLst>
+                </a:gridCol>
+                <a:gridCol w="5513832">
+                  <a:extLst>
+                    <a:ext uri="{9D8B030D-6E8A-4147-A177-3AD203B41FA5}">
+                      <a16:colId xmlns:a16="http://schemas.microsoft.com/office/drawing/2014/main" val="20002"/>
+                    </a:ext>
+                  </a:extLst>
+                </a:gridCol>
+                <a:gridCol w="1463040">
+                  <a:extLst>
+                    <a:ext uri="{9D8B030D-6E8A-4147-A177-3AD203B41FA5}">
+                      <a16:colId xmlns:a16="http://schemas.microsoft.com/office/drawing/2014/main" val="20003"/>
+                    </a:ext>
+                  </a:extLst>
+                </a:gridCol>
               </a:tblGrid>
               <a:tr h="457200">
                 <a:tc>
@@ -8684,7 +8668,7 @@
                     <a:bodyPr/>
                     <a:lstStyle/>
                     <a:p>
-                      <a:pPr indent="0" marL="0">
+                      <a:pPr marL="0" indent="0">
                         <a:buNone/>
                       </a:pPr>
                       <a:r>
@@ -8752,7 +8736,7 @@
                     <a:bodyPr/>
                     <a:lstStyle/>
                     <a:p>
-                      <a:pPr indent="0" marL="0">
+                      <a:pPr marL="0" indent="0">
                         <a:buNone/>
                       </a:pPr>
                       <a:r>
@@ -8820,7 +8804,7 @@
                     <a:bodyPr/>
                     <a:lstStyle/>
                     <a:p>
-                      <a:pPr indent="0" marL="0">
+                      <a:pPr marL="0" indent="0">
                         <a:buNone/>
                       </a:pPr>
                       <a:r>
@@ -8888,7 +8872,7 @@
                     <a:bodyPr/>
                     <a:lstStyle/>
                     <a:p>
-                      <a:pPr algn="ctr" indent="0" marL="0">
+                      <a:pPr marL="0" indent="0" algn="ctr">
                         <a:buNone/>
                       </a:pPr>
                       <a:r>
@@ -8951,6 +8935,11 @@
                     </a:solidFill>
                   </a:tcPr>
                 </a:tc>
+                <a:extLst>
+                  <a:ext uri="{0D108BD9-81ED-4DB2-BD59-A6C34878D82A}">
+                    <a16:rowId xmlns:a16="http://schemas.microsoft.com/office/drawing/2014/main" val="10000"/>
+                  </a:ext>
+                </a:extLst>
               </a:tr>
               <a:tr h="713232">
                 <a:tc>
@@ -8958,7 +8947,7 @@
                     <a:bodyPr/>
                     <a:lstStyle/>
                     <a:p>
-                      <a:pPr algn="l" indent="0" marL="0">
+                      <a:pPr marL="0" indent="0" algn="l">
                         <a:buNone/>
                       </a:pPr>
                       <a:r>
@@ -9026,7 +9015,7 @@
                     <a:bodyPr/>
                     <a:lstStyle/>
                     <a:p>
-                      <a:pPr algn="l" indent="0" marL="0">
+                      <a:pPr marL="0" indent="0" algn="l">
                         <a:buNone/>
                       </a:pPr>
                       <a:r>
@@ -9094,7 +9083,7 @@
                     <a:bodyPr/>
                     <a:lstStyle/>
                     <a:p>
-                      <a:pPr algn="l" indent="0" marL="0">
+                      <a:pPr marL="0" indent="0" algn="l">
                         <a:buNone/>
                       </a:pPr>
                       <a:r>
@@ -9162,7 +9151,7 @@
                     <a:bodyPr/>
                     <a:lstStyle/>
                     <a:p>
-                      <a:pPr algn="ctr" indent="0" marL="0">
+                      <a:pPr marL="0" indent="0" algn="ctr">
                         <a:buNone/>
                       </a:pPr>
                       <a:r>
@@ -9225,6 +9214,11 @@
                     </a:solidFill>
                   </a:tcPr>
                 </a:tc>
+                <a:extLst>
+                  <a:ext uri="{0D108BD9-81ED-4DB2-BD59-A6C34878D82A}">
+                    <a16:rowId xmlns:a16="http://schemas.microsoft.com/office/drawing/2014/main" val="10001"/>
+                  </a:ext>
+                </a:extLst>
               </a:tr>
               <a:tr h="713232">
                 <a:tc>
@@ -9232,7 +9226,7 @@
                     <a:bodyPr/>
                     <a:lstStyle/>
                     <a:p>
-                      <a:pPr algn="l" indent="0" marL="0">
+                      <a:pPr marL="0" indent="0" algn="l">
                         <a:buNone/>
                       </a:pPr>
                       <a:r>
@@ -9300,7 +9294,7 @@
                     <a:bodyPr/>
                     <a:lstStyle/>
                     <a:p>
-                      <a:pPr algn="l" indent="0" marL="0">
+                      <a:pPr marL="0" indent="0" algn="l">
                         <a:buNone/>
                       </a:pPr>
                       <a:r>
@@ -9368,7 +9362,7 @@
                     <a:bodyPr/>
                     <a:lstStyle/>
                     <a:p>
-                      <a:pPr algn="l" indent="0" marL="0">
+                      <a:pPr marL="0" indent="0" algn="l">
                         <a:buNone/>
                       </a:pPr>
                       <a:r>
@@ -9436,7 +9430,7 @@
                     <a:bodyPr/>
                     <a:lstStyle/>
                     <a:p>
-                      <a:pPr algn="ctr" indent="0" marL="0">
+                      <a:pPr marL="0" indent="0" algn="ctr">
                         <a:buNone/>
                       </a:pPr>
                       <a:r>
@@ -9499,6 +9493,11 @@
                     </a:solidFill>
                   </a:tcPr>
                 </a:tc>
+                <a:extLst>
+                  <a:ext uri="{0D108BD9-81ED-4DB2-BD59-A6C34878D82A}">
+                    <a16:rowId xmlns:a16="http://schemas.microsoft.com/office/drawing/2014/main" val="10002"/>
+                  </a:ext>
+                </a:extLst>
               </a:tr>
               <a:tr h="713232">
                 <a:tc>
@@ -9506,7 +9505,7 @@
                     <a:bodyPr/>
                     <a:lstStyle/>
                     <a:p>
-                      <a:pPr algn="l" indent="0" marL="0">
+                      <a:pPr marL="0" indent="0" algn="l">
                         <a:buNone/>
                       </a:pPr>
                       <a:r>
@@ -9574,7 +9573,7 @@
                     <a:bodyPr/>
                     <a:lstStyle/>
                     <a:p>
-                      <a:pPr algn="l" indent="0" marL="0">
+                      <a:pPr marL="0" indent="0" algn="l">
                         <a:buNone/>
                       </a:pPr>
                       <a:r>
@@ -9642,7 +9641,7 @@
                     <a:bodyPr/>
                     <a:lstStyle/>
                     <a:p>
-                      <a:pPr algn="l" indent="0" marL="0">
+                      <a:pPr marL="0" indent="0" algn="l">
                         <a:buNone/>
                       </a:pPr>
                       <a:r>
@@ -9710,7 +9709,7 @@
                     <a:bodyPr/>
                     <a:lstStyle/>
                     <a:p>
-                      <a:pPr algn="ctr" indent="0" marL="0">
+                      <a:pPr marL="0" indent="0" algn="ctr">
                         <a:buNone/>
                       </a:pPr>
                       <a:r>
@@ -9773,6 +9772,11 @@
                     </a:solidFill>
                   </a:tcPr>
                 </a:tc>
+                <a:extLst>
+                  <a:ext uri="{0D108BD9-81ED-4DB2-BD59-A6C34878D82A}">
+                    <a16:rowId xmlns:a16="http://schemas.microsoft.com/office/drawing/2014/main" val="10003"/>
+                  </a:ext>
+                </a:extLst>
               </a:tr>
               <a:tr h="713232">
                 <a:tc>
@@ -9780,7 +9784,7 @@
                     <a:bodyPr/>
                     <a:lstStyle/>
                     <a:p>
-                      <a:pPr algn="l" indent="0" marL="0">
+                      <a:pPr marL="0" indent="0" algn="l">
                         <a:buNone/>
                       </a:pPr>
                       <a:r>
@@ -9848,7 +9852,7 @@
                     <a:bodyPr/>
                     <a:lstStyle/>
                     <a:p>
-                      <a:pPr algn="l" indent="0" marL="0">
+                      <a:pPr marL="0" indent="0" algn="l">
                         <a:buNone/>
                       </a:pPr>
                       <a:r>
@@ -9916,7 +9920,7 @@
                     <a:bodyPr/>
                     <a:lstStyle/>
                     <a:p>
-                      <a:pPr algn="l" indent="0" marL="0">
+                      <a:pPr marL="0" indent="0" algn="l">
                         <a:buNone/>
                       </a:pPr>
                       <a:r>
@@ -9984,7 +9988,7 @@
                     <a:bodyPr/>
                     <a:lstStyle/>
                     <a:p>
-                      <a:pPr algn="ctr" indent="0" marL="0">
+                      <a:pPr marL="0" indent="0" algn="ctr">
                         <a:buNone/>
                       </a:pPr>
                       <a:r>
@@ -10047,6 +10051,11 @@
                     </a:solidFill>
                   </a:tcPr>
                 </a:tc>
+                <a:extLst>
+                  <a:ext uri="{0D108BD9-81ED-4DB2-BD59-A6C34878D82A}">
+                    <a16:rowId xmlns:a16="http://schemas.microsoft.com/office/drawing/2014/main" val="10004"/>
+                  </a:ext>
+                </a:extLst>
               </a:tr>
               <a:tr h="713232">
                 <a:tc>
@@ -10054,7 +10063,7 @@
                     <a:bodyPr/>
                     <a:lstStyle/>
                     <a:p>
-                      <a:pPr algn="l" indent="0" marL="0">
+                      <a:pPr marL="0" indent="0" algn="l">
                         <a:buNone/>
                       </a:pPr>
                       <a:r>
@@ -10122,7 +10131,7 @@
                     <a:bodyPr/>
                     <a:lstStyle/>
                     <a:p>
-                      <a:pPr algn="l" indent="0" marL="0">
+                      <a:pPr marL="0" indent="0" algn="l">
                         <a:buNone/>
                       </a:pPr>
                       <a:r>
@@ -10190,7 +10199,7 @@
                     <a:bodyPr/>
                     <a:lstStyle/>
                     <a:p>
-                      <a:pPr algn="l" indent="0" marL="0">
+                      <a:pPr marL="0" indent="0" algn="l">
                         <a:buNone/>
                       </a:pPr>
                       <a:r>
@@ -10258,7 +10267,7 @@
                     <a:bodyPr/>
                     <a:lstStyle/>
                     <a:p>
-                      <a:pPr algn="ctr" indent="0" marL="0">
+                      <a:pPr marL="0" indent="0" algn="ctr">
                         <a:buNone/>
                       </a:pPr>
                       <a:r>
@@ -10321,6 +10330,11 @@
                     </a:solidFill>
                   </a:tcPr>
                 </a:tc>
+                <a:extLst>
+                  <a:ext uri="{0D108BD9-81ED-4DB2-BD59-A6C34878D82A}">
+                    <a16:rowId xmlns:a16="http://schemas.microsoft.com/office/drawing/2014/main" val="10005"/>
+                  </a:ext>
+                </a:extLst>
               </a:tr>
             </a:tbl>
           </a:graphicData>
@@ -10328,7 +10342,7 @@
       </p:graphicFrame>
       <p:sp>
         <p:nvSpPr>
-          <p:cNvPr id="5" name="Shape 2"/>
+          <p:cNvPr id="4" name="Shape 2"/>
           <p:cNvSpPr/>
           <p:nvPr/>
         </p:nvSpPr>
@@ -10352,6 +10366,13 @@
             <a:prstDash val="solid"/>
           </a:ln>
         </p:spPr>
+        <p:txBody>
+          <a:bodyPr/>
+          <a:lstStyle/>
+          <a:p>
+            <a:endParaRPr lang="zh-CN" altLang="en-US"/>
+          </a:p>
+        </p:txBody>
       </p:sp>
       <p:sp>
         <p:nvSpPr>
@@ -10374,7 +10395,7 @@
           <a:bodyPr wrap="square" lIns="0" tIns="0" rIns="0" bIns="0" rtlCol="0" anchor="ctr"/>
           <a:lstStyle/>
           <a:p>
-            <a:pPr indent="0" marL="0">
+            <a:pPr marL="0" indent="0">
               <a:buNone/>
             </a:pPr>
             <a:r>
@@ -10388,9 +10409,6 @@
               </a:rPr>
               <a:t>总体判断：</a:t>
             </a:r>
-            <a:pPr indent="0" marL="0">
-              <a:buNone/>
-            </a:pPr>
             <a:r>
               <a:rPr lang="en-US" sz="1400" dirty="0">
                 <a:solidFill>
@@ -10427,7 +10445,7 @@
           <a:bodyPr wrap="square" lIns="0" tIns="0" rIns="0" bIns="0" rtlCol="0" anchor="ctr"/>
           <a:lstStyle/>
           <a:p>
-            <a:pPr algn="r" indent="0" marL="0">
+            <a:pPr marL="0" indent="0" algn="r">
               <a:buNone/>
             </a:pPr>
             <a:r>
@@ -10461,6 +10479,7 @@
         <a:solidFill>
           <a:srgbClr val="FFFFFF"/>
         </a:solidFill>
+        <a:effectLst/>
       </p:bgPr>
     </p:bg>
     <p:spTree>
@@ -10498,11 +10517,11 @@
           <a:bodyPr wrap="square" lIns="0" tIns="0" rIns="0" bIns="0" rtlCol="0" anchor="ctr"/>
           <a:lstStyle/>
           <a:p>
-            <a:pPr indent="0" marL="0">
-              <a:buNone/>
-            </a:pPr>
-            <a:r>
-              <a:rPr lang="en-US" sz="1200" b="1" spc="200" kern="0" dirty="0">
+            <a:pPr marL="0" indent="0">
+              <a:buNone/>
+            </a:pPr>
+            <a:r>
+              <a:rPr lang="en-US" sz="1200" b="1" kern="0" spc="200" dirty="0">
                 <a:solidFill>
                   <a:srgbClr val="2E75B6"/>
                 </a:solidFill>
@@ -10537,7 +10556,7 @@
           <a:bodyPr wrap="square" lIns="0" tIns="0" rIns="0" bIns="0" rtlCol="0" anchor="t"/>
           <a:lstStyle/>
           <a:p>
-            <a:pPr indent="0" marL="0">
+            <a:pPr marL="0" indent="0">
               <a:buNone/>
             </a:pPr>
             <a:r>
@@ -10579,6 +10598,13 @@
             <a:prstDash val="solid"/>
           </a:ln>
         </p:spPr>
+        <p:txBody>
+          <a:bodyPr/>
+          <a:lstStyle/>
+          <a:p>
+            <a:endParaRPr lang="zh-CN" altLang="en-US"/>
+          </a:p>
+        </p:txBody>
       </p:sp>
       <p:sp>
         <p:nvSpPr>
@@ -10601,7 +10627,7 @@
           <a:bodyPr wrap="square" lIns="0" tIns="0" rIns="0" bIns="0" rtlCol="0" anchor="ctr"/>
           <a:lstStyle/>
           <a:p>
-            <a:pPr algn="ctr" indent="0" marL="0">
+            <a:pPr marL="0" indent="0" algn="ctr">
               <a:buNone/>
             </a:pPr>
             <a:r>
@@ -10643,6 +10669,13 @@
             <a:prstDash val="solid"/>
           </a:ln>
         </p:spPr>
+        <p:txBody>
+          <a:bodyPr/>
+          <a:lstStyle/>
+          <a:p>
+            <a:endParaRPr lang="zh-CN" altLang="en-US"/>
+          </a:p>
+        </p:txBody>
       </p:sp>
       <p:sp>
         <p:nvSpPr>
@@ -10665,7 +10698,7 @@
           <a:bodyPr wrap="square" lIns="0" tIns="0" rIns="0" bIns="0" rtlCol="0" anchor="ctr"/>
           <a:lstStyle/>
           <a:p>
-            <a:pPr indent="0" marL="0">
+            <a:pPr marL="0" indent="0">
               <a:buNone/>
             </a:pPr>
             <a:r>
@@ -10707,6 +10740,13 @@
             <a:prstDash val="solid"/>
           </a:ln>
         </p:spPr>
+        <p:txBody>
+          <a:bodyPr/>
+          <a:lstStyle/>
+          <a:p>
+            <a:endParaRPr lang="zh-CN" altLang="en-US"/>
+          </a:p>
+        </p:txBody>
       </p:sp>
       <p:sp>
         <p:nvSpPr>
@@ -10729,7 +10769,7 @@
           <a:bodyPr wrap="square" lIns="0" tIns="0" rIns="0" bIns="0" rtlCol="0" anchor="ctr"/>
           <a:lstStyle/>
           <a:p>
-            <a:pPr algn="ctr" indent="0" marL="0">
+            <a:pPr marL="0" indent="0" algn="ctr">
               <a:buNone/>
             </a:pPr>
             <a:r>
@@ -10771,6 +10811,13 @@
             <a:prstDash val="solid"/>
           </a:ln>
         </p:spPr>
+        <p:txBody>
+          <a:bodyPr/>
+          <a:lstStyle/>
+          <a:p>
+            <a:endParaRPr lang="zh-CN" altLang="en-US"/>
+          </a:p>
+        </p:txBody>
       </p:sp>
       <p:sp>
         <p:nvSpPr>
@@ -10793,7 +10840,7 @@
           <a:bodyPr wrap="square" lIns="0" tIns="0" rIns="0" bIns="0" rtlCol="0" anchor="ctr"/>
           <a:lstStyle/>
           <a:p>
-            <a:pPr indent="0" marL="0">
+            <a:pPr marL="0" indent="0">
               <a:buNone/>
             </a:pPr>
             <a:r>
@@ -10835,6 +10882,13 @@
             <a:prstDash val="solid"/>
           </a:ln>
         </p:spPr>
+        <p:txBody>
+          <a:bodyPr/>
+          <a:lstStyle/>
+          <a:p>
+            <a:endParaRPr lang="zh-CN" altLang="en-US"/>
+          </a:p>
+        </p:txBody>
       </p:sp>
       <p:sp>
         <p:nvSpPr>
@@ -10857,7 +10911,7 @@
           <a:bodyPr wrap="square" lIns="0" tIns="0" rIns="0" bIns="0" rtlCol="0" anchor="ctr"/>
           <a:lstStyle/>
           <a:p>
-            <a:pPr algn="ctr" indent="0" marL="0">
+            <a:pPr marL="0" indent="0" algn="ctr">
               <a:buNone/>
             </a:pPr>
             <a:r>
@@ -10899,6 +10953,13 @@
             <a:prstDash val="solid"/>
           </a:ln>
         </p:spPr>
+        <p:txBody>
+          <a:bodyPr/>
+          <a:lstStyle/>
+          <a:p>
+            <a:endParaRPr lang="zh-CN" altLang="en-US"/>
+          </a:p>
+        </p:txBody>
       </p:sp>
       <p:sp>
         <p:nvSpPr>
@@ -10921,7 +10982,7 @@
           <a:bodyPr wrap="square" lIns="0" tIns="0" rIns="0" bIns="0" rtlCol="0" anchor="ctr"/>
           <a:lstStyle/>
           <a:p>
-            <a:pPr indent="0" marL="0">
+            <a:pPr marL="0" indent="0">
               <a:buNone/>
             </a:pPr>
             <a:r>
@@ -10963,6 +11024,13 @@
             <a:prstDash val="solid"/>
           </a:ln>
         </p:spPr>
+        <p:txBody>
+          <a:bodyPr/>
+          <a:lstStyle/>
+          <a:p>
+            <a:endParaRPr lang="zh-CN" altLang="en-US"/>
+          </a:p>
+        </p:txBody>
       </p:sp>
       <p:sp>
         <p:nvSpPr>
@@ -10985,7 +11053,7 @@
           <a:bodyPr wrap="square" lIns="0" tIns="0" rIns="0" bIns="0" rtlCol="0" anchor="ctr"/>
           <a:lstStyle/>
           <a:p>
-            <a:pPr algn="ctr" indent="0" marL="0">
+            <a:pPr marL="0" indent="0" algn="ctr">
               <a:buNone/>
             </a:pPr>
             <a:r>
@@ -11027,6 +11095,13 @@
             <a:prstDash val="solid"/>
           </a:ln>
         </p:spPr>
+        <p:txBody>
+          <a:bodyPr/>
+          <a:lstStyle/>
+          <a:p>
+            <a:endParaRPr lang="zh-CN" altLang="en-US"/>
+          </a:p>
+        </p:txBody>
       </p:sp>
       <p:sp>
         <p:nvSpPr>
@@ -11049,7 +11124,7 @@
           <a:bodyPr wrap="square" lIns="0" tIns="0" rIns="0" bIns="0" rtlCol="0" anchor="ctr"/>
           <a:lstStyle/>
           <a:p>
-            <a:pPr indent="0" marL="0">
+            <a:pPr marL="0" indent="0">
               <a:buNone/>
             </a:pPr>
             <a:r>
@@ -11091,6 +11166,13 @@
             <a:prstDash val="solid"/>
           </a:ln>
         </p:spPr>
+        <p:txBody>
+          <a:bodyPr/>
+          <a:lstStyle/>
+          <a:p>
+            <a:endParaRPr lang="zh-CN" altLang="en-US"/>
+          </a:p>
+        </p:txBody>
       </p:sp>
       <p:sp>
         <p:nvSpPr>
@@ -11113,7 +11195,7 @@
           <a:bodyPr wrap="square" lIns="0" tIns="0" rIns="0" bIns="0" rtlCol="0" anchor="ctr"/>
           <a:lstStyle/>
           <a:p>
-            <a:pPr algn="ctr" indent="0" marL="0">
+            <a:pPr marL="0" indent="0" algn="ctr">
               <a:buNone/>
             </a:pPr>
             <a:r>
@@ -11155,6 +11237,13 @@
             <a:prstDash val="solid"/>
           </a:ln>
         </p:spPr>
+        <p:txBody>
+          <a:bodyPr/>
+          <a:lstStyle/>
+          <a:p>
+            <a:endParaRPr lang="zh-CN" altLang="en-US"/>
+          </a:p>
+        </p:txBody>
       </p:sp>
       <p:sp>
         <p:nvSpPr>
@@ -11177,7 +11266,7 @@
           <a:bodyPr wrap="square" lIns="0" tIns="0" rIns="0" bIns="0" rtlCol="0" anchor="ctr"/>
           <a:lstStyle/>
           <a:p>
-            <a:pPr indent="0" marL="0">
+            <a:pPr marL="0" indent="0">
               <a:buNone/>
             </a:pPr>
             <a:r>
@@ -11197,14 +11286,14 @@
       </p:sp>
       <p:pic>
         <p:nvPicPr>
-          <p:cNvPr id="24" name="Image 0" descr="../软著材料/_build/shots/05_review.png">    </p:cNvPr>
+          <p:cNvPr id="24" name="Image 0" descr="../软著材料/_build/shots/05_review.png"/>
           <p:cNvPicPr>
             <a:picLocks noChangeAspect="1"/>
           </p:cNvPicPr>
           <p:nvPr/>
         </p:nvPicPr>
         <p:blipFill>
-          <a:blip r:embed="rId1"/>
+          <a:blip r:embed="rId3"/>
           <a:stretch>
             <a:fillRect/>
           </a:stretch>
@@ -11240,7 +11329,7 @@
           <a:bodyPr wrap="square" lIns="0" tIns="0" rIns="0" bIns="0" rtlCol="0" anchor="ctr"/>
           <a:lstStyle/>
           <a:p>
-            <a:pPr algn="ctr" indent="0" marL="0">
+            <a:pPr marL="0" indent="0" algn="ctr">
               <a:buNone/>
             </a:pPr>
             <a:r>
@@ -11279,7 +11368,7 @@
           <a:bodyPr wrap="square" lIns="0" tIns="0" rIns="0" bIns="0" rtlCol="0" anchor="t"/>
           <a:lstStyle/>
           <a:p>
-            <a:pPr indent="0" marL="0">
+            <a:pPr marL="0" indent="0">
               <a:buNone/>
             </a:pPr>
             <a:r>
@@ -11293,9 +11382,6 @@
               </a:rPr>
               <a:t>规模：</a:t>
             </a:r>
-            <a:pPr indent="0" marL="0">
-              <a:buNone/>
-            </a:pPr>
             <a:r>
               <a:rPr lang="en-US" sz="1300" dirty="0">
                 <a:solidFill>
@@ -11332,20 +11418,9 @@
           <a:bodyPr wrap="square" lIns="0" tIns="0" rIns="0" bIns="0" rtlCol="0" anchor="ctr"/>
           <a:lstStyle/>
           <a:p>
-            <a:pPr indent="0" marL="0">
-              <a:buNone/>
-            </a:pPr>
-            <a:r>
-              <a:rPr lang="en-US" sz="1050" dirty="0">
-                <a:solidFill>
-                  <a:srgbClr val="777777"/>
-                </a:solidFill>
-                <a:latin typeface="Microsoft YaHei" pitchFamily="34" charset="0"/>
-                <a:ea typeface="Microsoft YaHei" pitchFamily="34" charset="-122"/>
-                <a:cs typeface="Microsoft YaHei" pitchFamily="34" charset="-120"/>
-              </a:rPr>
-              <a:t>截图：智绘PCB v0.8 运行界面（软件著作权《用户操作手册》配图）</a:t>
-            </a:r>
+            <a:pPr marL="0" indent="0">
+              <a:buNone/>
+            </a:pPr>
             <a:endParaRPr lang="en-US" sz="1050" dirty="0"/>
           </a:p>
         </p:txBody>
@@ -11371,7 +11446,7 @@
           <a:bodyPr wrap="square" lIns="0" tIns="0" rIns="0" bIns="0" rtlCol="0" anchor="ctr"/>
           <a:lstStyle/>
           <a:p>
-            <a:pPr algn="r" indent="0" marL="0">
+            <a:pPr marL="0" indent="0" algn="r">
               <a:buNone/>
             </a:pPr>
             <a:r>
@@ -11405,6 +11480,7 @@
         <a:solidFill>
           <a:srgbClr val="FFFFFF"/>
         </a:solidFill>
+        <a:effectLst/>
       </p:bgPr>
     </p:bg>
     <p:spTree>
@@ -11442,11 +11518,11 @@
           <a:bodyPr wrap="square" lIns="0" tIns="0" rIns="0" bIns="0" rtlCol="0" anchor="ctr"/>
           <a:lstStyle/>
           <a:p>
-            <a:pPr indent="0" marL="0">
-              <a:buNone/>
-            </a:pPr>
-            <a:r>
-              <a:rPr lang="en-US" sz="1200" b="1" spc="200" kern="0" dirty="0">
+            <a:pPr marL="0" indent="0">
+              <a:buNone/>
+            </a:pPr>
+            <a:r>
+              <a:rPr lang="en-US" sz="1200" b="1" kern="0" spc="200" dirty="0">
                 <a:solidFill>
                   <a:srgbClr val="2E75B6"/>
                 </a:solidFill>
@@ -11481,7 +11557,7 @@
           <a:bodyPr wrap="square" lIns="0" tIns="0" rIns="0" bIns="0" rtlCol="0" anchor="t"/>
           <a:lstStyle/>
           <a:p>
-            <a:pPr indent="0" marL="0">
+            <a:pPr marL="0" indent="0">
               <a:buNone/>
             </a:pPr>
             <a:r>
@@ -11525,6 +11601,13 @@
             <a:prstDash val="solid"/>
           </a:ln>
         </p:spPr>
+        <p:txBody>
+          <a:bodyPr/>
+          <a:lstStyle/>
+          <a:p>
+            <a:endParaRPr lang="zh-CN" altLang="en-US"/>
+          </a:p>
+        </p:txBody>
       </p:sp>
       <p:sp>
         <p:nvSpPr>
@@ -11547,7 +11630,7 @@
           <a:bodyPr wrap="square" lIns="0" tIns="0" rIns="0" bIns="0" rtlCol="0" anchor="ctr"/>
           <a:lstStyle/>
           <a:p>
-            <a:pPr algn="ctr" indent="0" marL="0">
+            <a:pPr marL="0" indent="0" algn="ctr">
               <a:buNone/>
             </a:pPr>
             <a:r>
@@ -11586,7 +11669,7 @@
           <a:bodyPr wrap="square" lIns="0" tIns="0" rIns="0" bIns="0" rtlCol="0" anchor="t"/>
           <a:lstStyle/>
           <a:p>
-            <a:pPr algn="ctr" indent="0" marL="0">
+            <a:pPr marL="0" indent="0" algn="ctr">
               <a:buNone/>
             </a:pPr>
             <a:r>
@@ -11625,7 +11708,7 @@
           <a:bodyPr wrap="square" lIns="0" tIns="0" rIns="0" bIns="0" rtlCol="0" anchor="t"/>
           <a:lstStyle/>
           <a:p>
-            <a:pPr algn="ctr" indent="0" marL="0">
+            <a:pPr marL="0" indent="0" algn="ctr">
               <a:buNone/>
             </a:pPr>
             <a:r>
@@ -11669,6 +11752,13 @@
             <a:prstDash val="solid"/>
           </a:ln>
         </p:spPr>
+        <p:txBody>
+          <a:bodyPr/>
+          <a:lstStyle/>
+          <a:p>
+            <a:endParaRPr lang="zh-CN" altLang="en-US"/>
+          </a:p>
+        </p:txBody>
       </p:sp>
       <p:sp>
         <p:nvSpPr>
@@ -11691,7 +11781,7 @@
           <a:bodyPr wrap="square" lIns="0" tIns="0" rIns="0" bIns="0" rtlCol="0" anchor="ctr"/>
           <a:lstStyle/>
           <a:p>
-            <a:pPr algn="ctr" indent="0" marL="0">
+            <a:pPr marL="0" indent="0" algn="ctr">
               <a:buNone/>
             </a:pPr>
             <a:r>
@@ -11730,7 +11820,7 @@
           <a:bodyPr wrap="square" lIns="0" tIns="0" rIns="0" bIns="0" rtlCol="0" anchor="t"/>
           <a:lstStyle/>
           <a:p>
-            <a:pPr algn="ctr" indent="0" marL="0">
+            <a:pPr marL="0" indent="0" algn="ctr">
               <a:buNone/>
             </a:pPr>
             <a:r>
@@ -11769,7 +11859,7 @@
           <a:bodyPr wrap="square" lIns="0" tIns="0" rIns="0" bIns="0" rtlCol="0" anchor="t"/>
           <a:lstStyle/>
           <a:p>
-            <a:pPr algn="ctr" indent="0" marL="0">
+            <a:pPr marL="0" indent="0" algn="ctr">
               <a:buNone/>
             </a:pPr>
             <a:r>
@@ -11813,6 +11903,13 @@
             <a:prstDash val="solid"/>
           </a:ln>
         </p:spPr>
+        <p:txBody>
+          <a:bodyPr/>
+          <a:lstStyle/>
+          <a:p>
+            <a:endParaRPr lang="zh-CN" altLang="en-US"/>
+          </a:p>
+        </p:txBody>
       </p:sp>
       <p:sp>
         <p:nvSpPr>
@@ -11835,7 +11932,7 @@
           <a:bodyPr wrap="square" lIns="0" tIns="0" rIns="0" bIns="0" rtlCol="0" anchor="ctr"/>
           <a:lstStyle/>
           <a:p>
-            <a:pPr algn="ctr" indent="0" marL="0">
+            <a:pPr marL="0" indent="0" algn="ctr">
               <a:buNone/>
             </a:pPr>
             <a:r>
@@ -11874,7 +11971,7 @@
           <a:bodyPr wrap="square" lIns="0" tIns="0" rIns="0" bIns="0" rtlCol="0" anchor="t"/>
           <a:lstStyle/>
           <a:p>
-            <a:pPr algn="ctr" indent="0" marL="0">
+            <a:pPr marL="0" indent="0" algn="ctr">
               <a:buNone/>
             </a:pPr>
             <a:r>
@@ -11913,7 +12010,7 @@
           <a:bodyPr wrap="square" lIns="0" tIns="0" rIns="0" bIns="0" rtlCol="0" anchor="t"/>
           <a:lstStyle/>
           <a:p>
-            <a:pPr algn="ctr" indent="0" marL="0">
+            <a:pPr marL="0" indent="0" algn="ctr">
               <a:buNone/>
             </a:pPr>
             <a:r>
@@ -11957,6 +12054,13 @@
             <a:prstDash val="solid"/>
           </a:ln>
         </p:spPr>
+        <p:txBody>
+          <a:bodyPr/>
+          <a:lstStyle/>
+          <a:p>
+            <a:endParaRPr lang="zh-CN" altLang="en-US"/>
+          </a:p>
+        </p:txBody>
       </p:sp>
       <p:sp>
         <p:nvSpPr>
@@ -11979,7 +12083,7 @@
           <a:bodyPr wrap="square" lIns="0" tIns="0" rIns="0" bIns="0" rtlCol="0" anchor="ctr"/>
           <a:lstStyle/>
           <a:p>
-            <a:pPr algn="ctr" indent="0" marL="0">
+            <a:pPr marL="0" indent="0" algn="ctr">
               <a:buNone/>
             </a:pPr>
             <a:r>
@@ -12018,7 +12122,7 @@
           <a:bodyPr wrap="square" lIns="0" tIns="0" rIns="0" bIns="0" rtlCol="0" anchor="t"/>
           <a:lstStyle/>
           <a:p>
-            <a:pPr algn="ctr" indent="0" marL="0">
+            <a:pPr marL="0" indent="0" algn="ctr">
               <a:buNone/>
             </a:pPr>
             <a:r>
@@ -12057,7 +12161,7 @@
           <a:bodyPr wrap="square" lIns="0" tIns="0" rIns="0" bIns="0" rtlCol="0" anchor="t"/>
           <a:lstStyle/>
           <a:p>
-            <a:pPr algn="ctr" indent="0" marL="0">
+            <a:pPr marL="0" indent="0" algn="ctr">
               <a:buNone/>
             </a:pPr>
             <a:r>
@@ -12101,6 +12205,13 @@
             <a:prstDash val="solid"/>
           </a:ln>
         </p:spPr>
+        <p:txBody>
+          <a:bodyPr/>
+          <a:lstStyle/>
+          <a:p>
+            <a:endParaRPr lang="zh-CN" altLang="en-US"/>
+          </a:p>
+        </p:txBody>
       </p:sp>
       <p:sp>
         <p:nvSpPr>
@@ -12123,7 +12234,7 @@
           <a:bodyPr wrap="square" lIns="0" tIns="0" rIns="0" bIns="0" rtlCol="0" anchor="ctr"/>
           <a:lstStyle/>
           <a:p>
-            <a:pPr algn="ctr" indent="0" marL="0">
+            <a:pPr marL="0" indent="0" algn="ctr">
               <a:buNone/>
             </a:pPr>
             <a:r>
@@ -12162,7 +12273,7 @@
           <a:bodyPr wrap="square" lIns="0" tIns="0" rIns="0" bIns="0" rtlCol="0" anchor="t"/>
           <a:lstStyle/>
           <a:p>
-            <a:pPr algn="ctr" indent="0" marL="0">
+            <a:pPr marL="0" indent="0" algn="ctr">
               <a:buNone/>
             </a:pPr>
             <a:r>
@@ -12201,7 +12312,7 @@
           <a:bodyPr wrap="square" lIns="0" tIns="0" rIns="0" bIns="0" rtlCol="0" anchor="t"/>
           <a:lstStyle/>
           <a:p>
-            <a:pPr algn="ctr" indent="0" marL="0">
+            <a:pPr marL="0" indent="0" algn="ctr">
               <a:buNone/>
             </a:pPr>
             <a:r>
@@ -12245,6 +12356,13 @@
             <a:prstDash val="solid"/>
           </a:ln>
         </p:spPr>
+        <p:txBody>
+          <a:bodyPr/>
+          <a:lstStyle/>
+          <a:p>
+            <a:endParaRPr lang="zh-CN" altLang="en-US"/>
+          </a:p>
+        </p:txBody>
       </p:sp>
       <p:sp>
         <p:nvSpPr>
@@ -12267,7 +12385,7 @@
           <a:bodyPr wrap="square" lIns="0" tIns="0" rIns="0" bIns="0" rtlCol="0" anchor="ctr"/>
           <a:lstStyle/>
           <a:p>
-            <a:pPr indent="0" marL="0">
+            <a:pPr marL="0" indent="0">
               <a:buNone/>
             </a:pPr>
             <a:r>
@@ -12281,9 +12399,6 @@
               </a:rPr>
               <a:t>实验规模：</a:t>
             </a:r>
-            <a:pPr indent="0" marL="0">
-              <a:buNone/>
-            </a:pPr>
             <a:r>
               <a:rPr lang="en-US" sz="1350" dirty="0">
                 <a:solidFill>
@@ -12384,7 +12499,7 @@
           <a:bodyPr wrap="square" lIns="0" tIns="0" rIns="0" bIns="0" rtlCol="0" anchor="ctr"/>
           <a:lstStyle/>
           <a:p>
-            <a:pPr indent="0" marL="0">
+            <a:pPr marL="0" indent="0">
               <a:buNone/>
             </a:pPr>
             <a:r>
@@ -12423,7 +12538,7 @@
           <a:bodyPr wrap="square" lIns="0" tIns="0" rIns="0" bIns="0" rtlCol="0" anchor="ctr"/>
           <a:lstStyle/>
           <a:p>
-            <a:pPr algn="r" indent="0" marL="0">
+            <a:pPr marL="0" indent="0" algn="r">
               <a:buNone/>
             </a:pPr>
             <a:r>
@@ -12457,6 +12572,7 @@
         <a:solidFill>
           <a:srgbClr val="FFFFFF"/>
         </a:solidFill>
+        <a:effectLst/>
       </p:bgPr>
     </p:bg>
     <p:spTree>
@@ -12494,11 +12610,11 @@
           <a:bodyPr wrap="square" lIns="0" tIns="0" rIns="0" bIns="0" rtlCol="0" anchor="ctr"/>
           <a:lstStyle/>
           <a:p>
-            <a:pPr indent="0" marL="0">
-              <a:buNone/>
-            </a:pPr>
-            <a:r>
-              <a:rPr lang="en-US" sz="1200" b="1" spc="200" kern="0" dirty="0">
+            <a:pPr marL="0" indent="0">
+              <a:buNone/>
+            </a:pPr>
+            <a:r>
+              <a:rPr lang="en-US" sz="1200" b="1" kern="0" spc="200" dirty="0">
                 <a:solidFill>
                   <a:srgbClr val="2E75B6"/>
                 </a:solidFill>
@@ -12533,7 +12649,7 @@
           <a:bodyPr wrap="square" lIns="0" tIns="0" rIns="0" bIns="0" rtlCol="0" anchor="t"/>
           <a:lstStyle/>
           <a:p>
-            <a:pPr indent="0" marL="0">
+            <a:pPr marL="0" indent="0">
               <a:buNone/>
             </a:pPr>
             <a:r>
@@ -12553,7 +12669,7 @@
       </p:sp>
       <p:graphicFrame>
         <p:nvGraphicFramePr>
-          <p:cNvPr id="4" name="Chart 0" descr=""/>
+          <p:cNvPr id="4" name="Chart 0"/>
           <p:cNvGraphicFramePr/>
           <p:nvPr/>
         </p:nvGraphicFramePr>
@@ -12561,9 +12677,9 @@
           <a:off x="457200" y="1463040"/>
           <a:ext cx="5394960" cy="4114800"/>
         </p:xfrm>
-        <a:graphic xmlns:a="http://schemas.openxmlformats.org/drawingml/2006/main">
+        <a:graphic>
           <a:graphicData uri="http://schemas.openxmlformats.org/drawingml/2006/chart">
-            <c:chart xmlns:c="http://schemas.openxmlformats.org/drawingml/2006/chart" r:id="rId1"/>
+            <c:chart xmlns:c="http://schemas.openxmlformats.org/drawingml/2006/chart" xmlns:r="http://schemas.openxmlformats.org/officeDocument/2006/relationships" r:id="rId3"/>
           </a:graphicData>
         </a:graphic>
       </p:graphicFrame>
@@ -12694,7 +12810,7 @@
           <a:bodyPr wrap="square" lIns="0" tIns="0" rIns="0" bIns="0" rtlCol="0" anchor="ctr"/>
           <a:lstStyle/>
           <a:p>
-            <a:pPr indent="0" marL="0">
+            <a:pPr marL="0" indent="0">
               <a:buNone/>
             </a:pPr>
             <a:r>
@@ -12733,7 +12849,7 @@
           <a:bodyPr wrap="square" lIns="0" tIns="0" rIns="0" bIns="0" rtlCol="0" anchor="ctr"/>
           <a:lstStyle/>
           <a:p>
-            <a:pPr algn="r" indent="0" marL="0">
+            <a:pPr marL="0" indent="0" algn="r">
               <a:buNone/>
             </a:pPr>
             <a:r>
@@ -12767,6 +12883,7 @@
         <a:solidFill>
           <a:srgbClr val="FFFFFF"/>
         </a:solidFill>
+        <a:effectLst/>
       </p:bgPr>
     </p:bg>
     <p:spTree>
@@ -12804,11 +12921,11 @@
           <a:bodyPr wrap="square" lIns="0" tIns="0" rIns="0" bIns="0" rtlCol="0" anchor="ctr"/>
           <a:lstStyle/>
           <a:p>
-            <a:pPr indent="0" marL="0">
-              <a:buNone/>
-            </a:pPr>
-            <a:r>
-              <a:rPr lang="en-US" sz="1200" b="1" spc="200" kern="0" dirty="0">
+            <a:pPr marL="0" indent="0">
+              <a:buNone/>
+            </a:pPr>
+            <a:r>
+              <a:rPr lang="en-US" sz="1200" b="1" kern="0" spc="200" dirty="0">
                 <a:solidFill>
                   <a:srgbClr val="2E75B6"/>
                 </a:solidFill>
@@ -12843,7 +12960,7 @@
           <a:bodyPr wrap="square" lIns="0" tIns="0" rIns="0" bIns="0" rtlCol="0" anchor="t"/>
           <a:lstStyle/>
           <a:p>
-            <a:pPr indent="0" marL="0">
+            <a:pPr marL="0" indent="0">
               <a:buNone/>
             </a:pPr>
             <a:r>
@@ -12887,6 +13004,13 @@
             <a:prstDash val="solid"/>
           </a:ln>
         </p:spPr>
+        <p:txBody>
+          <a:bodyPr/>
+          <a:lstStyle/>
+          <a:p>
+            <a:endParaRPr lang="zh-CN" altLang="en-US"/>
+          </a:p>
+        </p:txBody>
       </p:sp>
       <p:sp>
         <p:nvSpPr>
@@ -12909,7 +13033,7 @@
           <a:bodyPr wrap="square" lIns="0" tIns="0" rIns="0" bIns="0" rtlCol="0" anchor="ctr"/>
           <a:lstStyle/>
           <a:p>
-            <a:pPr indent="0" marL="0">
+            <a:pPr marL="0" indent="0">
               <a:buNone/>
             </a:pPr>
             <a:r>
@@ -12948,7 +13072,7 @@
           <a:bodyPr wrap="square" lIns="0" tIns="0" rIns="0" bIns="0" rtlCol="0" anchor="ctr"/>
           <a:lstStyle/>
           <a:p>
-            <a:pPr indent="0" marL="0">
+            <a:pPr marL="0" indent="0">
               <a:buNone/>
             </a:pPr>
             <a:r>
@@ -12987,7 +13111,7 @@
           <a:bodyPr wrap="square" lIns="0" tIns="0" rIns="0" bIns="0" rtlCol="0" anchor="t"/>
           <a:lstStyle/>
           <a:p>
-            <a:pPr indent="0" marL="0">
+            <a:pPr marL="0" indent="0">
               <a:buNone/>
             </a:pPr>
             <a:r>
@@ -13116,6 +13240,13 @@
             <a:prstDash val="solid"/>
           </a:ln>
         </p:spPr>
+        <p:txBody>
+          <a:bodyPr/>
+          <a:lstStyle/>
+          <a:p>
+            <a:endParaRPr lang="zh-CN" altLang="en-US"/>
+          </a:p>
+        </p:txBody>
       </p:sp>
       <p:sp>
         <p:nvSpPr>
@@ -13138,7 +13269,7 @@
           <a:bodyPr wrap="square" lIns="0" tIns="0" rIns="0" bIns="0" rtlCol="0" anchor="ctr"/>
           <a:lstStyle/>
           <a:p>
-            <a:pPr indent="0" marL="0">
+            <a:pPr marL="0" indent="0">
               <a:buNone/>
             </a:pPr>
             <a:r>
@@ -13177,7 +13308,7 @@
           <a:bodyPr wrap="square" lIns="0" tIns="0" rIns="0" bIns="0" rtlCol="0" anchor="ctr"/>
           <a:lstStyle/>
           <a:p>
-            <a:pPr indent="0" marL="0">
+            <a:pPr marL="0" indent="0">
               <a:buNone/>
             </a:pPr>
             <a:r>
@@ -13216,7 +13347,7 @@
           <a:bodyPr wrap="square" lIns="0" tIns="0" rIns="0" bIns="0" rtlCol="0" anchor="t"/>
           <a:lstStyle/>
           <a:p>
-            <a:pPr indent="0" marL="0">
+            <a:pPr marL="0" indent="0">
               <a:buNone/>
             </a:pPr>
             <a:r>
@@ -13324,6 +13455,13 @@
             <a:prstDash val="solid"/>
           </a:ln>
         </p:spPr>
+        <p:txBody>
+          <a:bodyPr/>
+          <a:lstStyle/>
+          <a:p>
+            <a:endParaRPr lang="zh-CN" altLang="en-US"/>
+          </a:p>
+        </p:txBody>
       </p:sp>
       <p:sp>
         <p:nvSpPr>
@@ -13346,7 +13484,7 @@
           <a:bodyPr wrap="square" lIns="0" tIns="0" rIns="0" bIns="0" rtlCol="0" anchor="ctr"/>
           <a:lstStyle/>
           <a:p>
-            <a:pPr indent="0" marL="0">
+            <a:pPr marL="0" indent="0">
               <a:buNone/>
             </a:pPr>
             <a:r>
@@ -13385,7 +13523,7 @@
           <a:bodyPr wrap="square" lIns="0" tIns="0" rIns="0" bIns="0" rtlCol="0" anchor="ctr"/>
           <a:lstStyle/>
           <a:p>
-            <a:pPr indent="0" marL="0">
+            <a:pPr marL="0" indent="0">
               <a:buNone/>
             </a:pPr>
             <a:r>
@@ -13424,7 +13562,7 @@
           <a:bodyPr wrap="square" lIns="0" tIns="0" rIns="0" bIns="0" rtlCol="0" anchor="t"/>
           <a:lstStyle/>
           <a:p>
-            <a:pPr indent="0" marL="0">
+            <a:pPr marL="0" indent="0">
               <a:buNone/>
             </a:pPr>
             <a:r>
@@ -13548,7 +13686,7 @@
           <a:bodyPr wrap="square" lIns="0" tIns="0" rIns="0" bIns="0" rtlCol="0" anchor="ctr"/>
           <a:lstStyle/>
           <a:p>
-            <a:pPr indent="0" marL="0">
+            <a:pPr marL="0" indent="0">
               <a:buNone/>
             </a:pPr>
             <a:r>
@@ -13587,7 +13725,7 @@
           <a:bodyPr wrap="square" lIns="0" tIns="0" rIns="0" bIns="0" rtlCol="0" anchor="ctr"/>
           <a:lstStyle/>
           <a:p>
-            <a:pPr algn="r" indent="0" marL="0">
+            <a:pPr marL="0" indent="0" algn="r">
               <a:buNone/>
             </a:pPr>
             <a:r>
@@ -13621,6 +13759,7 @@
         <a:solidFill>
           <a:srgbClr val="FFFFFF"/>
         </a:solidFill>
+        <a:effectLst/>
       </p:bgPr>
     </p:bg>
     <p:spTree>
@@ -13658,11 +13797,11 @@
           <a:bodyPr wrap="square" lIns="0" tIns="0" rIns="0" bIns="0" rtlCol="0" anchor="ctr"/>
           <a:lstStyle/>
           <a:p>
-            <a:pPr indent="0" marL="0">
-              <a:buNone/>
-            </a:pPr>
-            <a:r>
-              <a:rPr lang="en-US" sz="1200" b="1" spc="200" kern="0" dirty="0">
+            <a:pPr marL="0" indent="0">
+              <a:buNone/>
+            </a:pPr>
+            <a:r>
+              <a:rPr lang="en-US" sz="1200" b="1" kern="0" spc="200" dirty="0">
                 <a:solidFill>
                   <a:srgbClr val="2E75B6"/>
                 </a:solidFill>
@@ -13697,7 +13836,7 @@
           <a:bodyPr wrap="square" lIns="0" tIns="0" rIns="0" bIns="0" rtlCol="0" anchor="t"/>
           <a:lstStyle/>
           <a:p>
-            <a:pPr indent="0" marL="0">
+            <a:pPr marL="0" indent="0">
               <a:buNone/>
             </a:pPr>
             <a:r>
@@ -13741,6 +13880,13 @@
             <a:prstDash val="solid"/>
           </a:ln>
         </p:spPr>
+        <p:txBody>
+          <a:bodyPr/>
+          <a:lstStyle/>
+          <a:p>
+            <a:endParaRPr lang="zh-CN" altLang="en-US"/>
+          </a:p>
+        </p:txBody>
       </p:sp>
       <p:sp>
         <p:nvSpPr>
@@ -13763,7 +13909,7 @@
           <a:bodyPr wrap="square" lIns="0" tIns="0" rIns="0" bIns="0" rtlCol="0" anchor="ctr"/>
           <a:lstStyle/>
           <a:p>
-            <a:pPr indent="0" marL="0">
+            <a:pPr marL="0" indent="0">
               <a:buNone/>
             </a:pPr>
             <a:r>
@@ -13802,7 +13948,7 @@
           <a:bodyPr wrap="square" lIns="0" tIns="0" rIns="0" bIns="0" rtlCol="0" anchor="t"/>
           <a:lstStyle/>
           <a:p>
-            <a:pPr indent="0" marL="0">
+            <a:pPr marL="0" indent="0">
               <a:spcAft>
                 <a:spcPts val="600"/>
               </a:spcAft>
@@ -13849,6 +13995,13 @@
             <a:prstDash val="solid"/>
           </a:ln>
         </p:spPr>
+        <p:txBody>
+          <a:bodyPr/>
+          <a:lstStyle/>
+          <a:p>
+            <a:endParaRPr lang="zh-CN" altLang="en-US"/>
+          </a:p>
+        </p:txBody>
       </p:sp>
       <p:sp>
         <p:nvSpPr>
@@ -13871,7 +14024,7 @@
           <a:bodyPr wrap="square" lIns="0" tIns="0" rIns="0" bIns="0" rtlCol="0" anchor="ctr"/>
           <a:lstStyle/>
           <a:p>
-            <a:pPr indent="0" marL="0">
+            <a:pPr marL="0" indent="0">
               <a:buNone/>
             </a:pPr>
             <a:r>
@@ -13910,7 +14063,7 @@
           <a:bodyPr wrap="square" lIns="0" tIns="0" rIns="0" bIns="0" rtlCol="0" anchor="t"/>
           <a:lstStyle/>
           <a:p>
-            <a:pPr indent="0" marL="0">
+            <a:pPr marL="0" indent="0">
               <a:spcAft>
                 <a:spcPts val="600"/>
               </a:spcAft>
@@ -13957,6 +14110,13 @@
             <a:prstDash val="solid"/>
           </a:ln>
         </p:spPr>
+        <p:txBody>
+          <a:bodyPr/>
+          <a:lstStyle/>
+          <a:p>
+            <a:endParaRPr lang="zh-CN" altLang="en-US"/>
+          </a:p>
+        </p:txBody>
       </p:sp>
       <p:sp>
         <p:nvSpPr>
@@ -13979,7 +14139,7 @@
           <a:bodyPr wrap="square" lIns="0" tIns="0" rIns="0" bIns="0" rtlCol="0" anchor="ctr"/>
           <a:lstStyle/>
           <a:p>
-            <a:pPr indent="0" marL="0">
+            <a:pPr marL="0" indent="0">
               <a:buNone/>
             </a:pPr>
             <a:r>
@@ -14018,7 +14178,7 @@
           <a:bodyPr wrap="square" lIns="0" tIns="0" rIns="0" bIns="0" rtlCol="0" anchor="t"/>
           <a:lstStyle/>
           <a:p>
-            <a:pPr indent="0" marL="0">
+            <a:pPr marL="0" indent="0">
               <a:spcAft>
                 <a:spcPts val="600"/>
               </a:spcAft>
@@ -14065,6 +14225,13 @@
             <a:prstDash val="solid"/>
           </a:ln>
         </p:spPr>
+        <p:txBody>
+          <a:bodyPr/>
+          <a:lstStyle/>
+          <a:p>
+            <a:endParaRPr lang="zh-CN" altLang="en-US"/>
+          </a:p>
+        </p:txBody>
       </p:sp>
       <p:sp>
         <p:nvSpPr>
@@ -14087,7 +14254,7 @@
           <a:bodyPr wrap="square" lIns="0" tIns="0" rIns="0" bIns="0" rtlCol="0" anchor="ctr"/>
           <a:lstStyle/>
           <a:p>
-            <a:pPr indent="0" marL="0">
+            <a:pPr marL="0" indent="0">
               <a:buNone/>
             </a:pPr>
             <a:r>
@@ -14126,7 +14293,7 @@
           <a:bodyPr wrap="square" lIns="0" tIns="0" rIns="0" bIns="0" rtlCol="0" anchor="t"/>
           <a:lstStyle/>
           <a:p>
-            <a:pPr indent="0" marL="0">
+            <a:pPr marL="0" indent="0">
               <a:spcAft>
                 <a:spcPts val="600"/>
               </a:spcAft>
@@ -14168,7 +14335,7 @@
           <a:bodyPr wrap="square" lIns="0" tIns="0" rIns="0" bIns="0" rtlCol="0" anchor="ctr"/>
           <a:lstStyle/>
           <a:p>
-            <a:pPr indent="0" marL="0">
+            <a:pPr marL="0" indent="0">
               <a:buNone/>
             </a:pPr>
             <a:r>
@@ -14207,7 +14374,7 @@
           <a:bodyPr wrap="square" lIns="0" tIns="0" rIns="0" bIns="0" rtlCol="0" anchor="ctr"/>
           <a:lstStyle/>
           <a:p>
-            <a:pPr algn="r" indent="0" marL="0">
+            <a:pPr marL="0" indent="0" algn="r">
               <a:buNone/>
             </a:pPr>
             <a:r>
@@ -14526,4 +14693,319 @@
     </a:ext>
   </a:extLst>
 </a:theme>
+</file>
+
+<file path=ppt/theme/theme2.xml><?xml version="1.0" encoding="utf-8"?>
+<a:theme xmlns:a="http://schemas.openxmlformats.org/drawingml/2006/main" name="Office 主题​​">
+  <a:themeElements>
+    <a:clrScheme name="Office">
+      <a:dk1>
+        <a:sysClr val="windowText" lastClr="000000"/>
+      </a:dk1>
+      <a:lt1>
+        <a:sysClr val="window" lastClr="FFFFFF"/>
+      </a:lt1>
+      <a:dk2>
+        <a:srgbClr val="0E2841"/>
+      </a:dk2>
+      <a:lt2>
+        <a:srgbClr val="E8E8E8"/>
+      </a:lt2>
+      <a:accent1>
+        <a:srgbClr val="156082"/>
+      </a:accent1>
+      <a:accent2>
+        <a:srgbClr val="E97132"/>
+      </a:accent2>
+      <a:accent3>
+        <a:srgbClr val="196B24"/>
+      </a:accent3>
+      <a:accent4>
+        <a:srgbClr val="0F9ED5"/>
+      </a:accent4>
+      <a:accent5>
+        <a:srgbClr val="A02B93"/>
+      </a:accent5>
+      <a:accent6>
+        <a:srgbClr val="4EA72E"/>
+      </a:accent6>
+      <a:hlink>
+        <a:srgbClr val="467886"/>
+      </a:hlink>
+      <a:folHlink>
+        <a:srgbClr val="96607D"/>
+      </a:folHlink>
+    </a:clrScheme>
+    <a:fontScheme name="Office">
+      <a:majorFont>
+        <a:latin typeface="等线 Light" panose="02110004020202020204"/>
+        <a:ea typeface=""/>
+        <a:cs typeface=""/>
+        <a:font script="Jpan" typeface="游ゴシック Light"/>
+        <a:font script="Hang" typeface="맑은 고딕"/>
+        <a:font script="Hans" typeface="等线 Light"/>
+        <a:font script="Hant" typeface="新細明體"/>
+        <a:font script="Arab" typeface="Times New Roman"/>
+        <a:font script="Hebr" typeface="Times New Roman"/>
+        <a:font script="Thai" typeface="Angsana New"/>
+        <a:font script="Ethi" typeface="Nyala"/>
+        <a:font script="Beng" typeface="Vrinda"/>
+        <a:font script="Gujr" typeface="Shruti"/>
+        <a:font script="Khmr" typeface="MoolBoran"/>
+        <a:font script="Knda" typeface="Tunga"/>
+        <a:font script="Guru" typeface="Raavi"/>
+        <a:font script="Cans" typeface="Euphemia"/>
+        <a:font script="Cher" typeface="Plantagenet Cherokee"/>
+        <a:font script="Yiii" typeface="Microsoft Yi Baiti"/>
+        <a:font script="Tibt" typeface="Microsoft Himalaya"/>
+        <a:font script="Thaa" typeface="MV Boli"/>
+        <a:font script="Deva" typeface="Mangal"/>
+        <a:font script="Telu" typeface="Gautami"/>
+        <a:font script="Taml" typeface="Latha"/>
+        <a:font script="Syrc" typeface="Estrangelo Edessa"/>
+        <a:font script="Orya" typeface="Kalinga"/>
+        <a:font script="Mlym" typeface="Kartika"/>
+        <a:font script="Laoo" typeface="DokChampa"/>
+        <a:font script="Sinh" typeface="Iskoola Pota"/>
+        <a:font script="Mong" typeface="Mongolian Baiti"/>
+        <a:font script="Viet" typeface="Times New Roman"/>
+        <a:font script="Uigh" typeface="Microsoft Uighur"/>
+        <a:font script="Geor" typeface="Sylfaen"/>
+        <a:font script="Armn" typeface="Arial"/>
+        <a:font script="Bugi" typeface="Leelawadee UI"/>
+        <a:font script="Bopo" typeface="Microsoft JhengHei"/>
+        <a:font script="Java" typeface="Javanese Text"/>
+        <a:font script="Lisu" typeface="Segoe UI"/>
+        <a:font script="Mymr" typeface="Myanmar Text"/>
+        <a:font script="Nkoo" typeface="Ebrima"/>
+        <a:font script="Olck" typeface="Nirmala UI"/>
+        <a:font script="Osma" typeface="Ebrima"/>
+        <a:font script="Phag" typeface="Phagspa"/>
+        <a:font script="Syrn" typeface="Estrangelo Edessa"/>
+        <a:font script="Syrj" typeface="Estrangelo Edessa"/>
+        <a:font script="Syre" typeface="Estrangelo Edessa"/>
+        <a:font script="Sora" typeface="Nirmala UI"/>
+        <a:font script="Tale" typeface="Microsoft Tai Le"/>
+        <a:font script="Talu" typeface="Microsoft New Tai Lue"/>
+        <a:font script="Tfng" typeface="Ebrima"/>
+      </a:majorFont>
+      <a:minorFont>
+        <a:latin typeface="等线" panose="02110004020202020204"/>
+        <a:ea typeface=""/>
+        <a:cs typeface=""/>
+        <a:font script="Jpan" typeface="游ゴシック"/>
+        <a:font script="Hang" typeface="맑은 고딕"/>
+        <a:font script="Hans" typeface="等线"/>
+        <a:font script="Hant" typeface="新細明體"/>
+        <a:font script="Arab" typeface="Arial"/>
+        <a:font script="Hebr" typeface="Arial"/>
+        <a:font script="Thai" typeface="Cordia New"/>
+        <a:font script="Ethi" typeface="Nyala"/>
+        <a:font script="Beng" typeface="Vrinda"/>
+        <a:font script="Gujr" typeface="Shruti"/>
+        <a:font script="Khmr" typeface="DaunPenh"/>
+        <a:font script="Knda" typeface="Tunga"/>
+        <a:font script="Guru" typeface="Raavi"/>
+        <a:font script="Cans" typeface="Euphemia"/>
+        <a:font script="Cher" typeface="Plantagenet Cherokee"/>
+        <a:font script="Yiii" typeface="Microsoft Yi Baiti"/>
+        <a:font script="Tibt" typeface="Microsoft Himalaya"/>
+        <a:font script="Thaa" typeface="MV Boli"/>
+        <a:font script="Deva" typeface="Mangal"/>
+        <a:font script="Telu" typeface="Gautami"/>
+        <a:font script="Taml" typeface="Latha"/>
+        <a:font script="Syrc" typeface="Estrangelo Edessa"/>
+        <a:font script="Orya" typeface="Kalinga"/>
+        <a:font script="Mlym" typeface="Kartika"/>
+        <a:font script="Laoo" typeface="DokChampa"/>
+        <a:font script="Sinh" typeface="Iskoola Pota"/>
+        <a:font script="Mong" typeface="Mongolian Baiti"/>
+        <a:font script="Viet" typeface="Arial"/>
+        <a:font script="Uigh" typeface="Microsoft Uighur"/>
+        <a:font script="Geor" typeface="Sylfaen"/>
+        <a:font script="Armn" typeface="Arial"/>
+        <a:font script="Bugi" typeface="Leelawadee UI"/>
+        <a:font script="Bopo" typeface="Microsoft JhengHei"/>
+        <a:font script="Java" typeface="Javanese Text"/>
+        <a:font script="Lisu" typeface="Segoe UI"/>
+        <a:font script="Mymr" typeface="Myanmar Text"/>
+        <a:font script="Nkoo" typeface="Ebrima"/>
+        <a:font script="Olck" typeface="Nirmala UI"/>
+        <a:font script="Osma" typeface="Ebrima"/>
+        <a:font script="Phag" typeface="Phagspa"/>
+        <a:font script="Syrn" typeface="Estrangelo Edessa"/>
+        <a:font script="Syrj" typeface="Estrangelo Edessa"/>
+        <a:font script="Syre" typeface="Estrangelo Edessa"/>
+        <a:font script="Sora" typeface="Nirmala UI"/>
+        <a:font script="Tale" typeface="Microsoft Tai Le"/>
+        <a:font script="Talu" typeface="Microsoft New Tai Lue"/>
+        <a:font script="Tfng" typeface="Ebrima"/>
+      </a:minorFont>
+    </a:fontScheme>
+    <a:fmtScheme name="Office">
+      <a:fillStyleLst>
+        <a:solidFill>
+          <a:schemeClr val="phClr"/>
+        </a:solidFill>
+        <a:gradFill rotWithShape="1">
+          <a:gsLst>
+            <a:gs pos="0">
+              <a:schemeClr val="phClr">
+                <a:lumMod val="110000"/>
+                <a:satMod val="105000"/>
+                <a:tint val="67000"/>
+              </a:schemeClr>
+            </a:gs>
+            <a:gs pos="50000">
+              <a:schemeClr val="phClr">
+                <a:lumMod val="105000"/>
+                <a:satMod val="103000"/>
+                <a:tint val="73000"/>
+              </a:schemeClr>
+            </a:gs>
+            <a:gs pos="100000">
+              <a:schemeClr val="phClr">
+                <a:lumMod val="105000"/>
+                <a:satMod val="109000"/>
+                <a:tint val="81000"/>
+              </a:schemeClr>
+            </a:gs>
+          </a:gsLst>
+          <a:lin ang="5400000" scaled="0"/>
+        </a:gradFill>
+        <a:gradFill rotWithShape="1">
+          <a:gsLst>
+            <a:gs pos="0">
+              <a:schemeClr val="phClr">
+                <a:satMod val="103000"/>
+                <a:lumMod val="102000"/>
+                <a:tint val="94000"/>
+              </a:schemeClr>
+            </a:gs>
+            <a:gs pos="50000">
+              <a:schemeClr val="phClr">
+                <a:satMod val="110000"/>
+                <a:lumMod val="100000"/>
+                <a:shade val="100000"/>
+              </a:schemeClr>
+            </a:gs>
+            <a:gs pos="100000">
+              <a:schemeClr val="phClr">
+                <a:lumMod val="99000"/>
+                <a:satMod val="120000"/>
+                <a:shade val="78000"/>
+              </a:schemeClr>
+            </a:gs>
+          </a:gsLst>
+          <a:lin ang="5400000" scaled="0"/>
+        </a:gradFill>
+      </a:fillStyleLst>
+      <a:lnStyleLst>
+        <a:ln w="12700" cap="flat" cmpd="sng" algn="ctr">
+          <a:solidFill>
+            <a:schemeClr val="phClr"/>
+          </a:solidFill>
+          <a:prstDash val="solid"/>
+          <a:miter lim="800000"/>
+        </a:ln>
+        <a:ln w="19050" cap="flat" cmpd="sng" algn="ctr">
+          <a:solidFill>
+            <a:schemeClr val="phClr"/>
+          </a:solidFill>
+          <a:prstDash val="solid"/>
+          <a:miter lim="800000"/>
+        </a:ln>
+        <a:ln w="25400" cap="flat" cmpd="sng" algn="ctr">
+          <a:solidFill>
+            <a:schemeClr val="phClr"/>
+          </a:solidFill>
+          <a:prstDash val="solid"/>
+          <a:miter lim="800000"/>
+        </a:ln>
+      </a:lnStyleLst>
+      <a:effectStyleLst>
+        <a:effectStyle>
+          <a:effectLst/>
+        </a:effectStyle>
+        <a:effectStyle>
+          <a:effectLst/>
+        </a:effectStyle>
+        <a:effectStyle>
+          <a:effectLst>
+            <a:outerShdw blurRad="57150" dist="19050" dir="5400000" algn="ctr" rotWithShape="0">
+              <a:srgbClr val="000000">
+                <a:alpha val="63000"/>
+              </a:srgbClr>
+            </a:outerShdw>
+          </a:effectLst>
+        </a:effectStyle>
+      </a:effectStyleLst>
+      <a:bgFillStyleLst>
+        <a:solidFill>
+          <a:schemeClr val="phClr"/>
+        </a:solidFill>
+        <a:solidFill>
+          <a:schemeClr val="phClr">
+            <a:tint val="95000"/>
+            <a:satMod val="170000"/>
+          </a:schemeClr>
+        </a:solidFill>
+        <a:gradFill rotWithShape="1">
+          <a:gsLst>
+            <a:gs pos="0">
+              <a:schemeClr val="phClr">
+                <a:tint val="93000"/>
+                <a:satMod val="150000"/>
+                <a:shade val="98000"/>
+                <a:lumMod val="102000"/>
+              </a:schemeClr>
+            </a:gs>
+            <a:gs pos="50000">
+              <a:schemeClr val="phClr">
+                <a:tint val="98000"/>
+                <a:satMod val="130000"/>
+                <a:shade val="90000"/>
+                <a:lumMod val="103000"/>
+              </a:schemeClr>
+            </a:gs>
+            <a:gs pos="100000">
+              <a:schemeClr val="phClr">
+                <a:shade val="63000"/>
+                <a:satMod val="120000"/>
+              </a:schemeClr>
+            </a:gs>
+          </a:gsLst>
+          <a:lin ang="5400000" scaled="0"/>
+        </a:gradFill>
+      </a:bgFillStyleLst>
+    </a:fmtScheme>
+  </a:themeElements>
+  <a:objectDefaults>
+    <a:lnDef>
+      <a:spPr/>
+      <a:bodyPr/>
+      <a:lstStyle/>
+      <a:style>
+        <a:lnRef idx="2">
+          <a:schemeClr val="accent1"/>
+        </a:lnRef>
+        <a:fillRef idx="0">
+          <a:schemeClr val="accent1"/>
+        </a:fillRef>
+        <a:effectRef idx="1">
+          <a:schemeClr val="accent1"/>
+        </a:effectRef>
+        <a:fontRef idx="minor">
+          <a:schemeClr val="tx1"/>
+        </a:fontRef>
+      </a:style>
+    </a:lnDef>
+  </a:objectDefaults>
+  <a:extraClrSchemeLst/>
+  <a:extLst>
+    <a:ext uri="{05A4C25C-085E-4340-85A3-A5531E510DB2}">
+      <thm15:themeFamily xmlns:thm15="http://schemas.microsoft.com/office/thememl/2012/main" name="Office Theme" id="{2E142A2C-CD16-42D6-873A-C26D2A0506FA}" vid="{1BDDFF52-6CD6-40A5-AB3C-68EB2F1E4D0A}"/>
+    </a:ext>
+  </a:extLst>
+</a:theme>
 </file>